--- a/AI-ASCEND-2026 Idea Submission Template.pptx
+++ b/AI-ASCEND-2026 Idea Submission Template.pptx
@@ -1,21 +1,21 @@
 
 <file path=ppt/presentation.xml><?xml version="1.0" encoding="utf-8"?>
-<p:presentation xmlns:a="http://schemas.openxmlformats.org/drawingml/2006/main" xmlns:r="http://schemas.openxmlformats.org/officeDocument/2006/relationships" xmlns:p="http://schemas.openxmlformats.org/presentationml/2006/main" saveSubsetFonts="1">
+<p:presentation xmlns:a="http://schemas.openxmlformats.org/drawingml/2006/main" xmlns:r="http://schemas.openxmlformats.org/officeDocument/2006/relationships" xmlns:p="http://schemas.openxmlformats.org/presentationml/2006/main">
   <p:sldMasterIdLst>
     <p:sldMasterId id="2147483648" r:id="rId1"/>
   </p:sldMasterIdLst>
   <p:notesMasterIdLst>
-    <p:notesMasterId r:id="rId10"/>
+    <p:notesMasterId r:id="rId11"/>
   </p:notesMasterIdLst>
   <p:sldIdLst>
-    <p:sldId id="269" r:id="rId2"/>
-    <p:sldId id="271" r:id="rId3"/>
-    <p:sldId id="277" r:id="rId4"/>
-    <p:sldId id="272" r:id="rId5"/>
-    <p:sldId id="273" r:id="rId6"/>
-    <p:sldId id="274" r:id="rId7"/>
-    <p:sldId id="275" r:id="rId8"/>
-    <p:sldId id="276" r:id="rId9"/>
+    <p:sldId id="269" r:id="rId3"/>
+    <p:sldId id="271" r:id="rId4"/>
+    <p:sldId id="277" r:id="rId5"/>
+    <p:sldId id="272" r:id="rId6"/>
+    <p:sldId id="273" r:id="rId7"/>
+    <p:sldId id="274" r:id="rId8"/>
+    <p:sldId id="275" r:id="rId9"/>
+    <p:sldId id="276" r:id="rId10"/>
   </p:sldIdLst>
   <p:sldSz cx="12192000" cy="6858000"/>
   <p:notesSz cx="6858000" cy="9144000"/>
@@ -116,7 +116,7 @@
   </p:defaultTextStyle>
   <p:extLst>
     <p:ext uri="{521415D9-36F7-43E2-AB2F-B90AF26B5E84}">
-      <p14:sectionLst xmlns="" xmlns:p14="http://schemas.microsoft.com/office/powerpoint/2010/main">
+      <p14:sectionLst xmlns:p14="http://schemas.microsoft.com/office/powerpoint/2010/main">
         <p14:section name="Default Section" id="{E9672267-D298-4EBA-8646-70B4D20BBBF9}">
           <p14:sldIdLst>
             <p14:sldId id="269"/>
@@ -135,13 +135,13 @@
       </p14:sectionLst>
     </p:ext>
     <p:ext uri="{EFAFB233-063F-42B5-8137-9DF3F51BA10A}">
-      <p15:sldGuideLst xmlns="" xmlns:p15="http://schemas.microsoft.com/office/powerpoint/2012/main">
-        <p15:guide id="1" orient="horz" pos="2160">
+      <p15:sldGuideLst xmlns:p15="http://schemas.microsoft.com/office/powerpoint/2012/main">
+        <p15:guide id="1" orient="horz" pos="2160" userDrawn="1">
           <p15:clr>
             <a:srgbClr val="A4A3A4"/>
           </p15:clr>
         </p15:guide>
-        <p15:guide id="2" pos="3840">
+        <p15:guide id="2" pos="3840" userDrawn="1">
           <p15:clr>
             <a:srgbClr val="A4A3A4"/>
           </p15:clr>
@@ -150,58 +150,6 @@
     </p:ext>
   </p:extLst>
 </p:presentation>
-</file>
-
-<file path=ppt/revisionInfo.xml><?xml version="1.0" encoding="utf-8"?>
-<p1510:revInfo xmlns:a="http://schemas.openxmlformats.org/drawingml/2006/main" xmlns:r="http://schemas.openxmlformats.org/officeDocument/2006/relationships" xmlns:p1510="http://schemas.microsoft.com/office/powerpoint/2015/10/main">
-  <p1510:revLst>
-    <p1510:client id="{883EEA56-5337-F248-AF7E-803CF910ED3E}" v="1" dt="2026-02-26T08:05:33.719"/>
-  </p1510:revLst>
-</p1510:revInfo>
-</file>
-
-<file path=ppt/changesInfos/changesInfo1.xml><?xml version="1.0" encoding="utf-8"?>
-<pc:chgInfo xmlns:a="http://schemas.openxmlformats.org/drawingml/2006/main" xmlns:r="http://schemas.openxmlformats.org/officeDocument/2006/relationships" xmlns:ac="http://schemas.microsoft.com/office/drawing/2013/main/command" xmlns:pc="http://schemas.microsoft.com/office/powerpoint/2013/main/command">
-  <pc:docChgLst>
-    <pc:chgData name="Meenakshi Kalyan Kumar" userId="26741764-42e2-43c1-86a2-b2b8035b2b99" providerId="ADAL" clId="{3B95FB4A-2150-5460-BC2E-537765526FF6}"/>
-    <pc:docChg chg="custSel addSld modSld">
-      <pc:chgData name="Meenakshi Kalyan Kumar" userId="26741764-42e2-43c1-86a2-b2b8035b2b99" providerId="ADAL" clId="{3B95FB4A-2150-5460-BC2E-537765526FF6}" dt="2026-02-26T08:08:01.915" v="243" actId="20577"/>
-      <pc:docMkLst>
-        <pc:docMk/>
-      </pc:docMkLst>
-      <pc:sldChg chg="delSp modSp mod">
-        <pc:chgData name="Meenakshi Kalyan Kumar" userId="26741764-42e2-43c1-86a2-b2b8035b2b99" providerId="ADAL" clId="{3B95FB4A-2150-5460-BC2E-537765526FF6}" dt="2026-02-26T08:08:01.915" v="243" actId="20577"/>
-        <pc:sldMkLst>
-          <pc:docMk/>
-          <pc:sldMk cId="1052782574" sldId="271"/>
-        </pc:sldMkLst>
-        <pc:spChg chg="mod">
-          <ac:chgData name="Meenakshi Kalyan Kumar" userId="26741764-42e2-43c1-86a2-b2b8035b2b99" providerId="ADAL" clId="{3B95FB4A-2150-5460-BC2E-537765526FF6}" dt="2026-02-26T08:08:01.915" v="243" actId="20577"/>
-          <ac:spMkLst>
-            <pc:docMk/>
-            <pc:sldMk cId="1052782574" sldId="271"/>
-            <ac:spMk id="3" creationId="{36281D8E-B6BF-076E-B29C-6D9D2789E7E7}"/>
-          </ac:spMkLst>
-        </pc:spChg>
-        <pc:spChg chg="del">
-          <ac:chgData name="Meenakshi Kalyan Kumar" userId="26741764-42e2-43c1-86a2-b2b8035b2b99" providerId="ADAL" clId="{3B95FB4A-2150-5460-BC2E-537765526FF6}" dt="2026-02-26T08:06:13.421" v="72" actId="478"/>
-          <ac:spMkLst>
-            <pc:docMk/>
-            <pc:sldMk cId="1052782574" sldId="271"/>
-            <ac:spMk id="5" creationId="{92E8A166-2518-468E-667D-11CCD3061AB8}"/>
-          </ac:spMkLst>
-        </pc:spChg>
-      </pc:sldChg>
-      <pc:sldChg chg="add">
-        <pc:chgData name="Meenakshi Kalyan Kumar" userId="26741764-42e2-43c1-86a2-b2b8035b2b99" providerId="ADAL" clId="{3B95FB4A-2150-5460-BC2E-537765526FF6}" dt="2026-02-26T08:05:33.717" v="0"/>
-        <pc:sldMkLst>
-          <pc:docMk/>
-          <pc:sldMk cId="2491953126" sldId="277"/>
-        </pc:sldMkLst>
-      </pc:sldChg>
-    </pc:docChg>
-  </pc:docChgLst>
-</pc:chgInfo>
 </file>
 
 <file path=ppt/notesMasters/notesMaster1.xml><?xml version="1.0" encoding="utf-8"?>
@@ -286,8 +234,6 @@
           <a:p>
             <a:fld id="{206DF21E-69C7-4354-A470-F83B39365EC1}" type="datetimeFigureOut">
               <a:rPr lang="en-US" smtClean="0"/>
-              <a:pPr/>
-              <a:t>3/5/2026</a:t>
             </a:fld>
             <a:endParaRPr lang="en-US"/>
           </a:p>
@@ -354,6 +300,7 @@
               <a:rPr lang="en-US"/>
               <a:t>Click to edit Master text styles</a:t>
             </a:r>
+            <a:endParaRPr lang="en-US"/>
           </a:p>
           <a:p>
             <a:pPr lvl="1"/>
@@ -361,6 +308,7 @@
               <a:rPr lang="en-US"/>
               <a:t>Second level</a:t>
             </a:r>
+            <a:endParaRPr lang="en-US"/>
           </a:p>
           <a:p>
             <a:pPr lvl="2"/>
@@ -368,6 +316,7 @@
               <a:rPr lang="en-US"/>
               <a:t>Third level</a:t>
             </a:r>
+            <a:endParaRPr lang="en-US"/>
           </a:p>
           <a:p>
             <a:pPr lvl="3"/>
@@ -375,6 +324,7 @@
               <a:rPr lang="en-US"/>
               <a:t>Fourth level</a:t>
             </a:r>
+            <a:endParaRPr lang="en-US"/>
           </a:p>
           <a:p>
             <a:pPr lvl="4"/>
@@ -382,6 +332,7 @@
               <a:rPr lang="en-US"/>
               <a:t>Fifth level</a:t>
             </a:r>
+            <a:endParaRPr lang="en-US"/>
           </a:p>
         </p:txBody>
       </p:sp>
@@ -445,19 +396,12 @@
           <a:p>
             <a:fld id="{DFCF4807-DCB7-4EAE-BDB6-520AE611E5FC}" type="slidenum">
               <a:rPr lang="en-US" smtClean="0"/>
-              <a:pPr/>
-              <a:t>‹#›</a:t>
             </a:fld>
             <a:endParaRPr lang="en-US"/>
           </a:p>
         </p:txBody>
       </p:sp>
     </p:spTree>
-    <p:extLst>
-      <p:ext uri="{BB962C8B-B14F-4D97-AF65-F5344CB8AC3E}">
-        <p14:creationId xmlns="" xmlns:p14="http://schemas.microsoft.com/office/powerpoint/2010/main" val="1099881225"/>
-      </p:ext>
-    </p:extLst>
   </p:cSld>
   <p:clrMap bg1="lt1" tx1="dk1" bg2="lt2" tx2="dk2" accent1="accent1" accent2="accent2" accent3="accent3" accent4="accent4" accent5="accent5" accent6="accent6" hlink="hlink" folHlink="folHlink"/>
   <p:notesStyle>
@@ -574,13 +518,7 @@
       </p:grpSpPr>
       <p:sp>
         <p:nvSpPr>
-          <p:cNvPr id="2" name="Title 1">
-            <a:extLst>
-              <a:ext uri="{FF2B5EF4-FFF2-40B4-BE49-F238E27FC236}">
-                <a16:creationId xmlns="" xmlns:a16="http://schemas.microsoft.com/office/drawing/2014/main" id="{1D86B926-1D6C-40F1-ABA2-61FBCDE00F03}"/>
-              </a:ext>
-            </a:extLst>
-          </p:cNvPr>
+          <p:cNvPr id="2" name="Title 1"/>
           <p:cNvSpPr>
             <a:spLocks noGrp="1"/>
           </p:cNvSpPr>
@@ -597,18 +535,13 @@
               <a:rPr lang="en-US"/>
               <a:t>Click to edit Master title style</a:t>
             </a:r>
+            <a:endParaRPr lang="en-US"/>
           </a:p>
         </p:txBody>
       </p:sp>
       <p:sp>
         <p:nvSpPr>
-          <p:cNvPr id="3" name="Content Placeholder 2">
-            <a:extLst>
-              <a:ext uri="{FF2B5EF4-FFF2-40B4-BE49-F238E27FC236}">
-                <a16:creationId xmlns="" xmlns:a16="http://schemas.microsoft.com/office/drawing/2014/main" id="{83DC84FB-309E-4EFF-7480-D080312F0DC5}"/>
-              </a:ext>
-            </a:extLst>
-          </p:cNvPr>
+          <p:cNvPr id="3" name="Content Placeholder 2"/>
           <p:cNvSpPr>
             <a:spLocks noGrp="1"/>
           </p:cNvSpPr>
@@ -626,6 +559,7 @@
               <a:rPr lang="en-US"/>
               <a:t>Click to edit Master text styles</a:t>
             </a:r>
+            <a:endParaRPr lang="en-US"/>
           </a:p>
           <a:p>
             <a:pPr lvl="1"/>
@@ -633,6 +567,7 @@
               <a:rPr lang="en-US"/>
               <a:t>Second level</a:t>
             </a:r>
+            <a:endParaRPr lang="en-US"/>
           </a:p>
           <a:p>
             <a:pPr lvl="2"/>
@@ -640,6 +575,7 @@
               <a:rPr lang="en-US"/>
               <a:t>Third level</a:t>
             </a:r>
+            <a:endParaRPr lang="en-US"/>
           </a:p>
           <a:p>
             <a:pPr lvl="3"/>
@@ -647,6 +583,7 @@
               <a:rPr lang="en-US"/>
               <a:t>Fourth level</a:t>
             </a:r>
+            <a:endParaRPr lang="en-US"/>
           </a:p>
           <a:p>
             <a:pPr lvl="4"/>
@@ -654,18 +591,13 @@
               <a:rPr lang="en-US"/>
               <a:t>Fifth level</a:t>
             </a:r>
+            <a:endParaRPr lang="en-US"/>
           </a:p>
         </p:txBody>
       </p:sp>
       <p:sp>
         <p:nvSpPr>
-          <p:cNvPr id="4" name="Date Placeholder 3">
-            <a:extLst>
-              <a:ext uri="{FF2B5EF4-FFF2-40B4-BE49-F238E27FC236}">
-                <a16:creationId xmlns="" xmlns:a16="http://schemas.microsoft.com/office/drawing/2014/main" id="{C7F87739-B7E7-A492-59DB-87F9FBA756D9}"/>
-              </a:ext>
-            </a:extLst>
-          </p:cNvPr>
+          <p:cNvPr id="4" name="Date Placeholder 3"/>
           <p:cNvSpPr>
             <a:spLocks noGrp="1"/>
           </p:cNvSpPr>
@@ -680,8 +612,6 @@
           <a:p>
             <a:fld id="{88687465-2B2D-4641-ADEF-56B79A15743E}" type="datetimeFigureOut">
               <a:rPr lang="en-US" smtClean="0"/>
-              <a:pPr/>
-              <a:t>3/5/2026</a:t>
             </a:fld>
             <a:endParaRPr lang="en-US"/>
           </a:p>
@@ -689,13 +619,7 @@
       </p:sp>
       <p:sp>
         <p:nvSpPr>
-          <p:cNvPr id="5" name="Footer Placeholder 4">
-            <a:extLst>
-              <a:ext uri="{FF2B5EF4-FFF2-40B4-BE49-F238E27FC236}">
-                <a16:creationId xmlns="" xmlns:a16="http://schemas.microsoft.com/office/drawing/2014/main" id="{D6C9CEB6-64EC-16CA-5955-9AC5A1439619}"/>
-              </a:ext>
-            </a:extLst>
-          </p:cNvPr>
+          <p:cNvPr id="5" name="Footer Placeholder 4"/>
           <p:cNvSpPr>
             <a:spLocks noGrp="1"/>
           </p:cNvSpPr>
@@ -714,13 +638,7 @@
       </p:sp>
       <p:sp>
         <p:nvSpPr>
-          <p:cNvPr id="6" name="Slide Number Placeholder 5">
-            <a:extLst>
-              <a:ext uri="{FF2B5EF4-FFF2-40B4-BE49-F238E27FC236}">
-                <a16:creationId xmlns="" xmlns:a16="http://schemas.microsoft.com/office/drawing/2014/main" id="{6E30A8CD-8520-633E-62AC-A7B222989757}"/>
-              </a:ext>
-            </a:extLst>
-          </p:cNvPr>
+          <p:cNvPr id="6" name="Slide Number Placeholder 5"/>
           <p:cNvSpPr>
             <a:spLocks noGrp="1"/>
           </p:cNvSpPr>
@@ -735,8 +653,6 @@
           <a:p>
             <a:fld id="{4B2BECDE-610D-4F59-A982-6427A24083A8}" type="slidenum">
               <a:rPr lang="en-US" smtClean="0"/>
-              <a:pPr/>
-              <a:t>‹#›</a:t>
             </a:fld>
             <a:endParaRPr lang="en-US"/>
           </a:p>
@@ -744,13 +660,7 @@
       </p:sp>
       <p:pic>
         <p:nvPicPr>
-          <p:cNvPr id="13" name="Picture 12">
-            <a:extLst>
-              <a:ext uri="{FF2B5EF4-FFF2-40B4-BE49-F238E27FC236}">
-                <a16:creationId xmlns="" xmlns:a16="http://schemas.microsoft.com/office/drawing/2014/main" id="{5BD6DE7F-CE27-8F4F-01CA-AAF557194C4E}"/>
-              </a:ext>
-            </a:extLst>
-          </p:cNvPr>
+          <p:cNvPr id="13" name="Picture 12"/>
           <p:cNvPicPr>
             <a:picLocks noChangeAspect="1"/>
           </p:cNvPicPr>
@@ -760,7 +670,7 @@
           <a:blip r:embed="rId2" cstate="print">
             <a:extLst>
               <a:ext uri="{28A0092B-C50C-407E-A947-70E740481C1C}">
-                <a14:useLocalDpi xmlns="" xmlns:a14="http://schemas.microsoft.com/office/drawing/2010/main" val="0"/>
+                <a14:useLocalDpi xmlns:a14="http://schemas.microsoft.com/office/drawing/2010/main" val="0"/>
               </a:ext>
             </a:extLst>
           </a:blip>
@@ -780,13 +690,7 @@
       </p:pic>
       <p:pic>
         <p:nvPicPr>
-          <p:cNvPr id="14" name="Picture 13">
-            <a:extLst>
-              <a:ext uri="{FF2B5EF4-FFF2-40B4-BE49-F238E27FC236}">
-                <a16:creationId xmlns="" xmlns:a16="http://schemas.microsoft.com/office/drawing/2014/main" id="{6581B546-6187-8B07-5ACE-97559C240945}"/>
-              </a:ext>
-            </a:extLst>
-          </p:cNvPr>
+          <p:cNvPr id="14" name="Picture 13"/>
           <p:cNvPicPr>
             <a:picLocks noChangeAspect="1"/>
           </p:cNvPicPr>
@@ -796,7 +700,7 @@
           <a:blip r:embed="rId3" cstate="print">
             <a:extLst>
               <a:ext uri="{28A0092B-C50C-407E-A947-70E740481C1C}">
-                <a14:useLocalDpi xmlns="" xmlns:a14="http://schemas.microsoft.com/office/drawing/2010/main" val="0"/>
+                <a14:useLocalDpi xmlns:a14="http://schemas.microsoft.com/office/drawing/2010/main" val="0"/>
               </a:ext>
             </a:extLst>
           </a:blip>
@@ -816,16 +720,8 @@
       </p:pic>
       <p:cxnSp>
         <p:nvCxnSpPr>
-          <p:cNvPr id="15" name="Straight Connector 14">
-            <a:extLst>
-              <a:ext uri="{FF2B5EF4-FFF2-40B4-BE49-F238E27FC236}">
-                <a16:creationId xmlns="" xmlns:a16="http://schemas.microsoft.com/office/drawing/2014/main" id="{AA2960F2-01A9-4ED8-2029-B58020D164FF}"/>
-              </a:ext>
-            </a:extLst>
-          </p:cNvPr>
-          <p:cNvCxnSpPr>
-            <a:cxnSpLocks/>
-          </p:cNvCxnSpPr>
+          <p:cNvPr id="15" name="Straight Connector 14"/>
+          <p:cNvCxnSpPr/>
           <p:nvPr userDrawn="1"/>
         </p:nvCxnSpPr>
         <p:spPr>
@@ -859,13 +755,7 @@
       </p:cxnSp>
       <p:grpSp>
         <p:nvGrpSpPr>
-          <p:cNvPr id="20" name="Group 19">
-            <a:extLst>
-              <a:ext uri="{FF2B5EF4-FFF2-40B4-BE49-F238E27FC236}">
-                <a16:creationId xmlns="" xmlns:a16="http://schemas.microsoft.com/office/drawing/2014/main" id="{59465667-6A80-9DC8-CA7E-EF706D3E8EC7}"/>
-              </a:ext>
-            </a:extLst>
-          </p:cNvPr>
+          <p:cNvPr id="20" name="Group 19"/>
           <p:cNvGrpSpPr/>
           <p:nvPr userDrawn="1"/>
         </p:nvGrpSpPr>
@@ -879,13 +769,7 @@
         </p:grpSpPr>
         <p:sp>
           <p:nvSpPr>
-            <p:cNvPr id="17" name="TextBox 16">
-              <a:extLst>
-                <a:ext uri="{FF2B5EF4-FFF2-40B4-BE49-F238E27FC236}">
-                  <a16:creationId xmlns="" xmlns:a16="http://schemas.microsoft.com/office/drawing/2014/main" id="{65EAD44A-E99F-9C1D-5E8A-5777F233E325}"/>
-                </a:ext>
-              </a:extLst>
-            </p:cNvPr>
+            <p:cNvPr id="17" name="TextBox 16"/>
             <p:cNvSpPr txBox="1"/>
             <p:nvPr userDrawn="1"/>
           </p:nvSpPr>
@@ -917,18 +801,19 @@
                 </a:rPr>
                 <a:t>AI ASCEND 2026</a:t>
               </a:r>
+              <a:endParaRPr lang="en-IN" sz="1200" b="1" dirty="0">
+                <a:solidFill>
+                  <a:srgbClr val="B46F00"/>
+                </a:solidFill>
+                <a:latin typeface="Arial" panose="020B0604020202020204" pitchFamily="34" charset="0"/>
+                <a:cs typeface="Arial" panose="020B0604020202020204" pitchFamily="34" charset="0"/>
+              </a:endParaRPr>
             </a:p>
           </p:txBody>
         </p:sp>
         <p:sp>
           <p:nvSpPr>
-            <p:cNvPr id="19" name="Rectangle 18">
-              <a:extLst>
-                <a:ext uri="{FF2B5EF4-FFF2-40B4-BE49-F238E27FC236}">
-                  <a16:creationId xmlns="" xmlns:a16="http://schemas.microsoft.com/office/drawing/2014/main" id="{49E8C284-CEBC-EF45-B8BC-D0B7B3DA3D35}"/>
-                </a:ext>
-              </a:extLst>
-            </p:cNvPr>
+            <p:cNvPr id="19" name="Rectangle 18"/>
             <p:cNvSpPr/>
             <p:nvPr userDrawn="1"/>
           </p:nvSpPr>
@@ -974,11 +859,6 @@
         </p:sp>
       </p:grpSp>
     </p:spTree>
-    <p:extLst>
-      <p:ext uri="{BB962C8B-B14F-4D97-AF65-F5344CB8AC3E}">
-        <p14:creationId xmlns="" xmlns:p14="http://schemas.microsoft.com/office/powerpoint/2010/main" val="2254221872"/>
-      </p:ext>
-    </p:extLst>
   </p:cSld>
   <p:clrMapOvr>
     <a:masterClrMapping/>
@@ -1010,13 +890,7 @@
       </p:grpSpPr>
       <p:sp>
         <p:nvSpPr>
-          <p:cNvPr id="2" name="Title Placeholder 1">
-            <a:extLst>
-              <a:ext uri="{FF2B5EF4-FFF2-40B4-BE49-F238E27FC236}">
-                <a16:creationId xmlns="" xmlns:a16="http://schemas.microsoft.com/office/drawing/2014/main" id="{9B379A9F-A905-3CC5-8630-88A3922D6D7D}"/>
-              </a:ext>
-            </a:extLst>
-          </p:cNvPr>
+          <p:cNvPr id="2" name="Title Placeholder 1"/>
           <p:cNvSpPr>
             <a:spLocks noGrp="1"/>
           </p:cNvSpPr>
@@ -1043,18 +917,13 @@
               <a:rPr lang="en-US"/>
               <a:t>Click to edit Master title style</a:t>
             </a:r>
+            <a:endParaRPr lang="en-US"/>
           </a:p>
         </p:txBody>
       </p:sp>
       <p:sp>
         <p:nvSpPr>
-          <p:cNvPr id="3" name="Text Placeholder 2">
-            <a:extLst>
-              <a:ext uri="{FF2B5EF4-FFF2-40B4-BE49-F238E27FC236}">
-                <a16:creationId xmlns="" xmlns:a16="http://schemas.microsoft.com/office/drawing/2014/main" id="{ED2E330B-FA6E-88DE-E088-07D342AC5202}"/>
-              </a:ext>
-            </a:extLst>
-          </p:cNvPr>
+          <p:cNvPr id="3" name="Text Placeholder 2"/>
           <p:cNvSpPr>
             <a:spLocks noGrp="1"/>
           </p:cNvSpPr>
@@ -1082,6 +951,7 @@
               <a:rPr lang="en-US"/>
               <a:t>Click to edit Master text styles</a:t>
             </a:r>
+            <a:endParaRPr lang="en-US"/>
           </a:p>
           <a:p>
             <a:pPr lvl="1"/>
@@ -1089,6 +959,7 @@
               <a:rPr lang="en-US"/>
               <a:t>Second level</a:t>
             </a:r>
+            <a:endParaRPr lang="en-US"/>
           </a:p>
           <a:p>
             <a:pPr lvl="2"/>
@@ -1096,6 +967,7 @@
               <a:rPr lang="en-US"/>
               <a:t>Third level</a:t>
             </a:r>
+            <a:endParaRPr lang="en-US"/>
           </a:p>
           <a:p>
             <a:pPr lvl="3"/>
@@ -1103,6 +975,7 @@
               <a:rPr lang="en-US"/>
               <a:t>Fourth level</a:t>
             </a:r>
+            <a:endParaRPr lang="en-US"/>
           </a:p>
           <a:p>
             <a:pPr lvl="4"/>
@@ -1110,18 +983,13 @@
               <a:rPr lang="en-US"/>
               <a:t>Fifth level</a:t>
             </a:r>
+            <a:endParaRPr lang="en-US"/>
           </a:p>
         </p:txBody>
       </p:sp>
       <p:sp>
         <p:nvSpPr>
-          <p:cNvPr id="4" name="Date Placeholder 3">
-            <a:extLst>
-              <a:ext uri="{FF2B5EF4-FFF2-40B4-BE49-F238E27FC236}">
-                <a16:creationId xmlns="" xmlns:a16="http://schemas.microsoft.com/office/drawing/2014/main" id="{B88738C7-C522-3962-E3D4-9A5352D98B01}"/>
-              </a:ext>
-            </a:extLst>
-          </p:cNvPr>
+          <p:cNvPr id="4" name="Date Placeholder 3"/>
           <p:cNvSpPr>
             <a:spLocks noGrp="1"/>
           </p:cNvSpPr>
@@ -1154,8 +1022,6 @@
           <a:p>
             <a:fld id="{88687465-2B2D-4641-ADEF-56B79A15743E}" type="datetimeFigureOut">
               <a:rPr lang="en-US" smtClean="0"/>
-              <a:pPr/>
-              <a:t>3/5/2026</a:t>
             </a:fld>
             <a:endParaRPr lang="en-US"/>
           </a:p>
@@ -1163,13 +1029,7 @@
       </p:sp>
       <p:sp>
         <p:nvSpPr>
-          <p:cNvPr id="5" name="Footer Placeholder 4">
-            <a:extLst>
-              <a:ext uri="{FF2B5EF4-FFF2-40B4-BE49-F238E27FC236}">
-                <a16:creationId xmlns="" xmlns:a16="http://schemas.microsoft.com/office/drawing/2014/main" id="{E4FCC5A9-EA30-0AB8-B8CC-244223E2B493}"/>
-              </a:ext>
-            </a:extLst>
-          </p:cNvPr>
+          <p:cNvPr id="5" name="Footer Placeholder 4"/>
           <p:cNvSpPr>
             <a:spLocks noGrp="1"/>
           </p:cNvSpPr>
@@ -1206,13 +1066,7 @@
       </p:sp>
       <p:sp>
         <p:nvSpPr>
-          <p:cNvPr id="6" name="Slide Number Placeholder 5">
-            <a:extLst>
-              <a:ext uri="{FF2B5EF4-FFF2-40B4-BE49-F238E27FC236}">
-                <a16:creationId xmlns="" xmlns:a16="http://schemas.microsoft.com/office/drawing/2014/main" id="{DD5DA7FC-6933-0156-880F-EC170BBE96C6}"/>
-              </a:ext>
-            </a:extLst>
-          </p:cNvPr>
+          <p:cNvPr id="6" name="Slide Number Placeholder 5"/>
           <p:cNvSpPr>
             <a:spLocks noGrp="1"/>
           </p:cNvSpPr>
@@ -1245,8 +1099,6 @@
           <a:p>
             <a:fld id="{4B2BECDE-610D-4F59-A982-6427A24083A8}" type="slidenum">
               <a:rPr lang="en-US" smtClean="0"/>
-              <a:pPr/>
-              <a:t>‹#›</a:t>
             </a:fld>
             <a:endParaRPr lang="en-US"/>
           </a:p>
@@ -1254,23 +1106,17 @@
       </p:sp>
       <p:pic>
         <p:nvPicPr>
-          <p:cNvPr id="7" name="Picture 6">
-            <a:extLst>
-              <a:ext uri="{FF2B5EF4-FFF2-40B4-BE49-F238E27FC236}">
-                <a16:creationId xmlns="" xmlns:a16="http://schemas.microsoft.com/office/drawing/2014/main" id="{B4C78F67-322E-DB24-75AC-E8EB47DF6207}"/>
-              </a:ext>
-            </a:extLst>
-          </p:cNvPr>
+          <p:cNvPr id="7" name="Picture 6"/>
           <p:cNvPicPr>
             <a:picLocks noChangeAspect="1"/>
           </p:cNvPicPr>
           <p:nvPr userDrawn="1"/>
         </p:nvPicPr>
         <p:blipFill>
-          <a:blip r:embed="rId3">
+          <a:blip r:embed="rId2">
             <a:extLst>
               <a:ext uri="{28A0092B-C50C-407E-A947-70E740481C1C}">
-                <a14:useLocalDpi xmlns="" xmlns:a14="http://schemas.microsoft.com/office/drawing/2010/main" val="0"/>
+                <a14:useLocalDpi xmlns:a14="http://schemas.microsoft.com/office/drawing/2010/main" val="0"/>
               </a:ext>
             </a:extLst>
           </a:blip>
@@ -1290,15 +1136,10 @@
         </p:spPr>
       </p:pic>
     </p:spTree>
-    <p:extLst>
-      <p:ext uri="{BB962C8B-B14F-4D97-AF65-F5344CB8AC3E}">
-        <p14:creationId xmlns="" xmlns:p14="http://schemas.microsoft.com/office/powerpoint/2010/main" val="1449952091"/>
-      </p:ext>
-    </p:extLst>
   </p:cSld>
   <p:clrMap bg1="lt1" tx1="dk1" bg2="lt2" tx2="dk2" accent1="accent1" accent2="accent2" accent3="accent3" accent4="accent4" accent5="accent5" accent6="accent6" hlink="hlink" folHlink="folHlink"/>
   <p:sldLayoutIdLst>
-    <p:sldLayoutId id="2147483650" r:id="rId1"/>
+    <p:sldLayoutId id="2147483649" r:id="rId1"/>
   </p:sldLayoutIdLst>
   <p:txStyles>
     <p:titleStyle>
@@ -1588,13 +1429,7 @@
   <p:cSld>
     <p:spTree>
       <p:nvGrpSpPr>
-        <p:cNvPr id="1" name="">
-          <a:extLst>
-            <a:ext uri="{FF2B5EF4-FFF2-40B4-BE49-F238E27FC236}">
-              <a16:creationId xmlns="" xmlns:a16="http://schemas.microsoft.com/office/drawing/2014/main" id="{A8D37FBD-1D3D-198E-24F3-B19FD135E32A}"/>
-            </a:ext>
-          </a:extLst>
-        </p:cNvPr>
+        <p:cNvPr id="1" name=""/>
         <p:cNvGrpSpPr/>
         <p:nvPr/>
       </p:nvGrpSpPr>
@@ -1608,23 +1443,17 @@
       </p:grpSpPr>
       <p:pic>
         <p:nvPicPr>
-          <p:cNvPr id="2" name="Picture 1">
-            <a:extLst>
-              <a:ext uri="{FF2B5EF4-FFF2-40B4-BE49-F238E27FC236}">
-                <a16:creationId xmlns="" xmlns:a16="http://schemas.microsoft.com/office/drawing/2014/main" id="{0B0ED046-9F1E-3DAC-03C1-3AD6E2D052DC}"/>
-              </a:ext>
-            </a:extLst>
-          </p:cNvPr>
+          <p:cNvPr id="2" name="Picture 1"/>
           <p:cNvPicPr>
             <a:picLocks noChangeAspect="1"/>
           </p:cNvPicPr>
           <p:nvPr/>
         </p:nvPicPr>
         <p:blipFill>
-          <a:blip r:embed="rId2">
+          <a:blip r:embed="rId1">
             <a:extLst>
               <a:ext uri="{28A0092B-C50C-407E-A947-70E740481C1C}">
-                <a14:useLocalDpi xmlns="" xmlns:a14="http://schemas.microsoft.com/office/drawing/2010/main" val="0"/>
+                <a14:useLocalDpi xmlns:a14="http://schemas.microsoft.com/office/drawing/2010/main" val="0"/>
               </a:ext>
             </a:extLst>
           </a:blip>
@@ -1645,23 +1474,17 @@
       </p:pic>
       <p:pic>
         <p:nvPicPr>
-          <p:cNvPr id="13" name="Picture 12">
-            <a:extLst>
-              <a:ext uri="{FF2B5EF4-FFF2-40B4-BE49-F238E27FC236}">
-                <a16:creationId xmlns="" xmlns:a16="http://schemas.microsoft.com/office/drawing/2014/main" id="{D2713AD4-D9E6-5399-56E1-0C691557DFC7}"/>
-              </a:ext>
-            </a:extLst>
-          </p:cNvPr>
+          <p:cNvPr id="13" name="Picture 12"/>
           <p:cNvPicPr>
             <a:picLocks noChangeAspect="1"/>
           </p:cNvPicPr>
           <p:nvPr/>
         </p:nvPicPr>
         <p:blipFill>
-          <a:blip r:embed="rId3" cstate="print">
+          <a:blip r:embed="rId2" cstate="print">
             <a:extLst>
               <a:ext uri="{28A0092B-C50C-407E-A947-70E740481C1C}">
-                <a14:useLocalDpi xmlns="" xmlns:a14="http://schemas.microsoft.com/office/drawing/2010/main" val="0"/>
+                <a14:useLocalDpi xmlns:a14="http://schemas.microsoft.com/office/drawing/2010/main" val="0"/>
               </a:ext>
             </a:extLst>
           </a:blip>
@@ -1681,23 +1504,17 @@
       </p:pic>
       <p:pic>
         <p:nvPicPr>
-          <p:cNvPr id="14" name="Picture 13">
-            <a:extLst>
-              <a:ext uri="{FF2B5EF4-FFF2-40B4-BE49-F238E27FC236}">
-                <a16:creationId xmlns="" xmlns:a16="http://schemas.microsoft.com/office/drawing/2014/main" id="{FD89AFF0-E7E8-5683-AE6A-82060294DED1}"/>
-              </a:ext>
-            </a:extLst>
-          </p:cNvPr>
+          <p:cNvPr id="14" name="Picture 13"/>
           <p:cNvPicPr>
             <a:picLocks noChangeAspect="1"/>
           </p:cNvPicPr>
           <p:nvPr/>
         </p:nvPicPr>
         <p:blipFill>
-          <a:blip r:embed="rId4" cstate="print">
+          <a:blip r:embed="rId3" cstate="print">
             <a:extLst>
               <a:ext uri="{28A0092B-C50C-407E-A947-70E740481C1C}">
-                <a14:useLocalDpi xmlns="" xmlns:a14="http://schemas.microsoft.com/office/drawing/2010/main" val="0"/>
+                <a14:useLocalDpi xmlns:a14="http://schemas.microsoft.com/office/drawing/2010/main" val="0"/>
               </a:ext>
             </a:extLst>
           </a:blip>
@@ -1717,13 +1534,7 @@
       </p:pic>
       <p:cxnSp>
         <p:nvCxnSpPr>
-          <p:cNvPr id="15" name="Straight Connector 14">
-            <a:extLst>
-              <a:ext uri="{FF2B5EF4-FFF2-40B4-BE49-F238E27FC236}">
-                <a16:creationId xmlns="" xmlns:a16="http://schemas.microsoft.com/office/drawing/2014/main" id="{08B24D6B-C4AD-AB69-F03A-0905AC8AB32B}"/>
-              </a:ext>
-            </a:extLst>
-          </p:cNvPr>
+          <p:cNvPr id="15" name="Straight Connector 14"/>
           <p:cNvCxnSpPr/>
           <p:nvPr/>
         </p:nvCxnSpPr>
@@ -1760,13 +1571,7 @@
       </p:cxnSp>
       <p:sp>
         <p:nvSpPr>
-          <p:cNvPr id="16" name="TextBox 15">
-            <a:extLst>
-              <a:ext uri="{FF2B5EF4-FFF2-40B4-BE49-F238E27FC236}">
-                <a16:creationId xmlns="" xmlns:a16="http://schemas.microsoft.com/office/drawing/2014/main" id="{0DCBBC87-5482-21D7-35FD-DA74800BD38F}"/>
-              </a:ext>
-            </a:extLst>
-          </p:cNvPr>
+          <p:cNvPr id="16" name="TextBox 15"/>
           <p:cNvSpPr txBox="1"/>
           <p:nvPr/>
         </p:nvSpPr>
@@ -1800,13 +1605,7 @@
       </p:sp>
       <p:sp>
         <p:nvSpPr>
-          <p:cNvPr id="17" name="TextBox 16">
-            <a:extLst>
-              <a:ext uri="{FF2B5EF4-FFF2-40B4-BE49-F238E27FC236}">
-                <a16:creationId xmlns="" xmlns:a16="http://schemas.microsoft.com/office/drawing/2014/main" id="{E6D47D14-6F84-4816-C343-543266D13293}"/>
-              </a:ext>
-            </a:extLst>
-          </p:cNvPr>
+          <p:cNvPr id="17" name="TextBox 16"/>
           <p:cNvSpPr txBox="1"/>
           <p:nvPr/>
         </p:nvSpPr>
@@ -1844,18 +1643,19 @@
               </a:rPr>
               <a:t>AI ASCEND 2026</a:t>
             </a:r>
+            <a:endParaRPr lang="en-IN" sz="9600" b="1" dirty="0">
+              <a:solidFill>
+                <a:srgbClr val="B46F00"/>
+              </a:solidFill>
+              <a:latin typeface="Arial" panose="020B0604020202020204" pitchFamily="34" charset="0"/>
+              <a:cs typeface="Arial" panose="020B0604020202020204" pitchFamily="34" charset="0"/>
+            </a:endParaRPr>
           </a:p>
         </p:txBody>
       </p:sp>
       <p:sp>
         <p:nvSpPr>
-          <p:cNvPr id="18" name="TextBox 17">
-            <a:extLst>
-              <a:ext uri="{FF2B5EF4-FFF2-40B4-BE49-F238E27FC236}">
-                <a16:creationId xmlns="" xmlns:a16="http://schemas.microsoft.com/office/drawing/2014/main" id="{7B3B18E2-603A-04C0-7514-1134B6CC4B58}"/>
-              </a:ext>
-            </a:extLst>
-          </p:cNvPr>
+          <p:cNvPr id="18" name="TextBox 17"/>
           <p:cNvSpPr txBox="1"/>
           <p:nvPr/>
         </p:nvSpPr>
@@ -1892,13 +1692,7 @@
       </p:sp>
       <p:sp>
         <p:nvSpPr>
-          <p:cNvPr id="19" name="TextBox 18">
-            <a:extLst>
-              <a:ext uri="{FF2B5EF4-FFF2-40B4-BE49-F238E27FC236}">
-                <a16:creationId xmlns="" xmlns:a16="http://schemas.microsoft.com/office/drawing/2014/main" id="{9700AE11-1280-2640-2B39-7CF3C149D249}"/>
-              </a:ext>
-            </a:extLst>
-          </p:cNvPr>
+          <p:cNvPr id="19" name="TextBox 18"/>
           <p:cNvSpPr txBox="1"/>
           <p:nvPr/>
         </p:nvSpPr>
@@ -1935,13 +1729,7 @@
       </p:sp>
       <p:grpSp>
         <p:nvGrpSpPr>
-          <p:cNvPr id="20" name="Group 19">
-            <a:extLst>
-              <a:ext uri="{FF2B5EF4-FFF2-40B4-BE49-F238E27FC236}">
-                <a16:creationId xmlns="" xmlns:a16="http://schemas.microsoft.com/office/drawing/2014/main" id="{F9BE94DD-CC39-F274-11FA-332B2DF5F30E}"/>
-              </a:ext>
-            </a:extLst>
-          </p:cNvPr>
+          <p:cNvPr id="20" name="Group 19"/>
           <p:cNvGrpSpPr/>
           <p:nvPr/>
         </p:nvGrpSpPr>
@@ -1955,23 +1743,17 @@
         </p:grpSpPr>
         <p:pic>
           <p:nvPicPr>
-            <p:cNvPr id="21" name="Picture 2" descr="Overview - Saveetha Engineering College">
-              <a:extLst>
-                <a:ext uri="{FF2B5EF4-FFF2-40B4-BE49-F238E27FC236}">
-                  <a16:creationId xmlns="" xmlns:a16="http://schemas.microsoft.com/office/drawing/2014/main" id="{9AB55898-55CD-2698-9B21-02BBEE09F9A3}"/>
-                </a:ext>
-              </a:extLst>
-            </p:cNvPr>
+            <p:cNvPr id="21" name="Picture 2" descr="Overview - Saveetha Engineering College"/>
             <p:cNvPicPr>
               <a:picLocks noChangeAspect="1" noChangeArrowheads="1"/>
             </p:cNvPicPr>
             <p:nvPr/>
           </p:nvPicPr>
           <p:blipFill>
-            <a:blip r:embed="rId5" cstate="print">
+            <a:blip r:embed="rId4" cstate="print">
               <a:extLst>
                 <a:ext uri="{28A0092B-C50C-407E-A947-70E740481C1C}">
-                  <a14:useLocalDpi xmlns="" xmlns:a14="http://schemas.microsoft.com/office/drawing/2010/main" val="0"/>
+                  <a14:useLocalDpi xmlns:a14="http://schemas.microsoft.com/office/drawing/2010/main" val="0"/>
                 </a:ext>
               </a:extLst>
             </a:blip>
@@ -1991,7 +1773,7 @@
             <a:noFill/>
             <a:extLst>
               <a:ext uri="{909E8E84-426E-40DD-AFC4-6F175D3DCCD1}">
-                <a14:hiddenFill xmlns="" xmlns:a14="http://schemas.microsoft.com/office/drawing/2010/main">
+                <a14:hiddenFill xmlns:a14="http://schemas.microsoft.com/office/drawing/2010/main">
                   <a:solidFill>
                     <a:srgbClr val="FFFFFF"/>
                   </a:solidFill>
@@ -2002,13 +1784,7 @@
         </p:pic>
         <p:sp>
           <p:nvSpPr>
-            <p:cNvPr id="22" name="TextBox 21">
-              <a:extLst>
-                <a:ext uri="{FF2B5EF4-FFF2-40B4-BE49-F238E27FC236}">
-                  <a16:creationId xmlns="" xmlns:a16="http://schemas.microsoft.com/office/drawing/2014/main" id="{A2D300D8-B1FF-BBE1-3C45-217F6C701E0D}"/>
-                </a:ext>
-              </a:extLst>
-            </p:cNvPr>
+            <p:cNvPr id="22" name="TextBox 21"/>
             <p:cNvSpPr txBox="1"/>
             <p:nvPr/>
           </p:nvSpPr>
@@ -2047,11 +1823,6 @@
         </p:sp>
       </p:grpSp>
     </p:spTree>
-    <p:extLst>
-      <p:ext uri="{BB962C8B-B14F-4D97-AF65-F5344CB8AC3E}">
-        <p14:creationId xmlns="" xmlns:p14="http://schemas.microsoft.com/office/powerpoint/2010/main" val="1405827157"/>
-      </p:ext>
-    </p:extLst>
   </p:cSld>
   <p:clrMapOvr>
     <a:masterClrMapping/>
@@ -2064,13 +1835,7 @@
   <p:cSld>
     <p:spTree>
       <p:nvGrpSpPr>
-        <p:cNvPr id="1" name="">
-          <a:extLst>
-            <a:ext uri="{FF2B5EF4-FFF2-40B4-BE49-F238E27FC236}">
-              <a16:creationId xmlns="" xmlns:a16="http://schemas.microsoft.com/office/drawing/2014/main" id="{4F95BC70-1C1A-58D6-9B03-ABD1F4167AD9}"/>
-            </a:ext>
-          </a:extLst>
-        </p:cNvPr>
+        <p:cNvPr id="1" name=""/>
         <p:cNvGrpSpPr/>
         <p:nvPr/>
       </p:nvGrpSpPr>
@@ -2084,20 +1849,14 @@
       </p:grpSpPr>
       <p:sp>
         <p:nvSpPr>
-          <p:cNvPr id="3" name="TextBox 2">
-            <a:extLst>
-              <a:ext uri="{FF2B5EF4-FFF2-40B4-BE49-F238E27FC236}">
-                <a16:creationId xmlns="" xmlns:a16="http://schemas.microsoft.com/office/drawing/2014/main" id="{36281D8E-B6BF-076E-B29C-6D9D2789E7E7}"/>
-              </a:ext>
-            </a:extLst>
-          </p:cNvPr>
+          <p:cNvPr id="3" name="TextBox 2"/>
           <p:cNvSpPr txBox="1"/>
           <p:nvPr/>
         </p:nvSpPr>
         <p:spPr>
           <a:xfrm>
             <a:off x="819912" y="1085767"/>
-            <a:ext cx="11811000" cy="3785652"/>
+            <a:ext cx="11811000" cy="2676525"/>
           </a:xfrm>
           <a:prstGeom prst="rect">
             <a:avLst/>
@@ -2159,15 +1918,12 @@
               </a:rPr>
               <a:t>.</a:t>
             </a:r>
-          </a:p>
-          <a:p>
-            <a:r>
-              <a:rPr lang="en-US" sz="2400" dirty="0">
-                <a:latin typeface="Arial" panose="020B0604020202020204" pitchFamily="34" charset="0"/>
-                <a:cs typeface="Arial" panose="020B0604020202020204" pitchFamily="34" charset="0"/>
-              </a:rPr>
-              <a:t/>
-            </a:r>
+            <a:endParaRPr lang="en-US" sz="2400" dirty="0" smtClean="0">
+              <a:latin typeface="Arial" panose="020B0604020202020204" pitchFamily="34" charset="0"/>
+              <a:cs typeface="Arial" panose="020B0604020202020204" pitchFamily="34" charset="0"/>
+            </a:endParaRPr>
+          </a:p>
+          <a:p>
             <a:br>
               <a:rPr lang="en-US" sz="2400" dirty="0">
                 <a:latin typeface="Arial" panose="020B0604020202020204" pitchFamily="34" charset="0"/>
@@ -2175,137 +1931,57 @@
               </a:rPr>
             </a:br>
             <a:r>
-              <a:rPr lang="en-US" sz="2400" b="1" dirty="0">
-                <a:latin typeface="Arial" panose="020B0604020202020204" pitchFamily="34" charset="0"/>
-                <a:cs typeface="Arial" panose="020B0604020202020204" pitchFamily="34" charset="0"/>
-              </a:rPr>
-              <a:t>Team Name </a:t>
-            </a:r>
-            <a:r>
-              <a:rPr lang="en-US" sz="2400" b="1" dirty="0" smtClean="0">
-                <a:latin typeface="Arial" panose="020B0604020202020204" pitchFamily="34" charset="0"/>
-                <a:cs typeface="Arial" panose="020B0604020202020204" pitchFamily="34" charset="0"/>
-              </a:rPr>
-              <a:t>: </a:t>
+              <a:rPr lang="en-GB" altLang="en-US" sz="2400" b="1" dirty="0" smtClean="0">
+                <a:latin typeface="Arial" panose="020B0604020202020204" pitchFamily="34" charset="0"/>
+                <a:cs typeface="Arial" panose="020B0604020202020204" pitchFamily="34" charset="0"/>
+              </a:rPr>
+              <a:t>Project by:</a:t>
+            </a:r>
+            <a:endParaRPr lang="en-US" sz="2400" b="1" dirty="0" smtClean="0">
+              <a:latin typeface="Arial" panose="020B0604020202020204" pitchFamily="34" charset="0"/>
+              <a:cs typeface="Arial" panose="020B0604020202020204" pitchFamily="34" charset="0"/>
+            </a:endParaRPr>
+          </a:p>
+          <a:p>
+            <a:endParaRPr lang="en-US" sz="2400" dirty="0">
+              <a:latin typeface="Arial" panose="020B0604020202020204" pitchFamily="34" charset="0"/>
+              <a:cs typeface="Arial" panose="020B0604020202020204" pitchFamily="34" charset="0"/>
+            </a:endParaRPr>
+          </a:p>
+          <a:p>
+            <a:r>
+              <a:rPr lang="en-US" sz="2400" dirty="0">
+                <a:latin typeface="Arial" panose="020B0604020202020204" pitchFamily="34" charset="0"/>
+                <a:cs typeface="Arial" panose="020B0604020202020204" pitchFamily="34" charset="0"/>
+              </a:rPr>
+              <a:t> HARINI. </a:t>
             </a:r>
             <a:r>
               <a:rPr lang="en-US" sz="2400" dirty="0" smtClean="0">
                 <a:latin typeface="Arial" panose="020B0604020202020204" pitchFamily="34" charset="0"/>
                 <a:cs typeface="Arial" panose="020B0604020202020204" pitchFamily="34" charset="0"/>
               </a:rPr>
-              <a:t>Code &amp; Sniff</a:t>
-            </a:r>
-          </a:p>
-          <a:p>
+              <a:t>M </a:t>
+            </a:r>
+            <a:endParaRPr lang="en-US" sz="2400" dirty="0" smtClean="0">
+              <a:latin typeface="Arial" panose="020B0604020202020204" pitchFamily="34" charset="0"/>
+              <a:cs typeface="Arial" panose="020B0604020202020204" pitchFamily="34" charset="0"/>
+            </a:endParaRPr>
+          </a:p>
+          <a:p>
+            <a:r>
+              <a:rPr lang="en-US" sz="2400" dirty="0" smtClean="0">
+                <a:latin typeface="Arial" panose="020B0604020202020204" pitchFamily="34" charset="0"/>
+                <a:cs typeface="Arial" panose="020B0604020202020204" pitchFamily="34" charset="0"/>
+              </a:rPr>
+              <a:t>(harinimanimaran07@gmail.com)</a:t>
+            </a:r>
             <a:endParaRPr lang="en-US" sz="2400" dirty="0">
               <a:latin typeface="Arial" panose="020B0604020202020204" pitchFamily="34" charset="0"/>
               <a:cs typeface="Arial" panose="020B0604020202020204" pitchFamily="34" charset="0"/>
             </a:endParaRPr>
           </a:p>
           <a:p>
-            <a:r>
-              <a:rPr lang="en-US" sz="2400" b="1" dirty="0">
-                <a:latin typeface="Arial" panose="020B0604020202020204" pitchFamily="34" charset="0"/>
-                <a:cs typeface="Arial" panose="020B0604020202020204" pitchFamily="34" charset="0"/>
-              </a:rPr>
-              <a:t>Team Member </a:t>
-            </a:r>
-            <a:r>
-              <a:rPr lang="en-US" sz="2400" b="1" dirty="0" smtClean="0">
-                <a:latin typeface="Arial" panose="020B0604020202020204" pitchFamily="34" charset="0"/>
-                <a:cs typeface="Arial" panose="020B0604020202020204" pitchFamily="34" charset="0"/>
-              </a:rPr>
-              <a:t>Details:</a:t>
-            </a:r>
-          </a:p>
-          <a:p>
-            <a:endParaRPr lang="en-US" sz="2400" b="1" dirty="0" smtClean="0">
-              <a:latin typeface="Arial" panose="020B0604020202020204" pitchFamily="34" charset="0"/>
-              <a:cs typeface="Arial" panose="020B0604020202020204" pitchFamily="34" charset="0"/>
-            </a:endParaRPr>
-          </a:p>
-          <a:p>
-            <a:r>
-              <a:rPr lang="en-US" sz="2400" dirty="0" smtClean="0">
-                <a:latin typeface="Arial" panose="020B0604020202020204" pitchFamily="34" charset="0"/>
-                <a:cs typeface="Arial" panose="020B0604020202020204" pitchFamily="34" charset="0"/>
-              </a:rPr>
-              <a:t>1</a:t>
-            </a:r>
-            <a:r>
-              <a:rPr lang="en-US" sz="2400" dirty="0">
-                <a:latin typeface="Arial" panose="020B0604020202020204" pitchFamily="34" charset="0"/>
-                <a:cs typeface="Arial" panose="020B0604020202020204" pitchFamily="34" charset="0"/>
-              </a:rPr>
-              <a:t>) DIVYA SRI. </a:t>
-            </a:r>
-            <a:r>
-              <a:rPr lang="en-US" sz="2400" dirty="0" smtClean="0">
-                <a:latin typeface="Arial" panose="020B0604020202020204" pitchFamily="34" charset="0"/>
-                <a:cs typeface="Arial" panose="020B0604020202020204" pitchFamily="34" charset="0"/>
-              </a:rPr>
-              <a:t>S (divya852006@gmail.com)</a:t>
-            </a:r>
-            <a:endParaRPr lang="en-US" sz="2400" dirty="0">
-              <a:latin typeface="Arial" panose="020B0604020202020204" pitchFamily="34" charset="0"/>
-              <a:cs typeface="Arial" panose="020B0604020202020204" pitchFamily="34" charset="0"/>
-            </a:endParaRPr>
-          </a:p>
-          <a:p>
-            <a:r>
-              <a:rPr lang="en-US" sz="2400" dirty="0">
-                <a:latin typeface="Arial" panose="020B0604020202020204" pitchFamily="34" charset="0"/>
-                <a:cs typeface="Arial" panose="020B0604020202020204" pitchFamily="34" charset="0"/>
-              </a:rPr>
-              <a:t>2) HARINI. </a:t>
-            </a:r>
-            <a:r>
-              <a:rPr lang="en-US" sz="2400" dirty="0" smtClean="0">
-                <a:latin typeface="Arial" panose="020B0604020202020204" pitchFamily="34" charset="0"/>
-                <a:cs typeface="Arial" panose="020B0604020202020204" pitchFamily="34" charset="0"/>
-              </a:rPr>
-              <a:t>M (harinimanimaran07@gmail.com)</a:t>
-            </a:r>
-            <a:endParaRPr lang="en-US" sz="2400" dirty="0">
-              <a:latin typeface="Arial" panose="020B0604020202020204" pitchFamily="34" charset="0"/>
-              <a:cs typeface="Arial" panose="020B0604020202020204" pitchFamily="34" charset="0"/>
-            </a:endParaRPr>
-          </a:p>
-          <a:p>
-            <a:r>
-              <a:rPr lang="en-US" sz="2400" dirty="0">
-                <a:latin typeface="Arial" panose="020B0604020202020204" pitchFamily="34" charset="0"/>
-                <a:cs typeface="Arial" panose="020B0604020202020204" pitchFamily="34" charset="0"/>
-              </a:rPr>
-              <a:t>3)TAMILARASI. </a:t>
-            </a:r>
-            <a:r>
-              <a:rPr lang="en-US" sz="2400" dirty="0" smtClean="0">
-                <a:latin typeface="Arial" panose="020B0604020202020204" pitchFamily="34" charset="0"/>
-                <a:cs typeface="Arial" panose="020B0604020202020204" pitchFamily="34" charset="0"/>
-              </a:rPr>
-              <a:t>G (tamilarasigopi2007@gmail.com)</a:t>
-            </a:r>
-            <a:endParaRPr lang="en-US" sz="2400" dirty="0">
-              <a:latin typeface="Arial" panose="020B0604020202020204" pitchFamily="34" charset="0"/>
-              <a:cs typeface="Arial" panose="020B0604020202020204" pitchFamily="34" charset="0"/>
-            </a:endParaRPr>
-          </a:p>
-          <a:p>
-            <a:r>
-              <a:rPr lang="en-US" sz="2400" dirty="0">
-                <a:latin typeface="Arial" panose="020B0604020202020204" pitchFamily="34" charset="0"/>
-                <a:cs typeface="Arial" panose="020B0604020202020204" pitchFamily="34" charset="0"/>
-              </a:rPr>
-              <a:t>4) VIJAYALAKSHMI. </a:t>
-            </a:r>
-            <a:r>
-              <a:rPr lang="en-US" sz="2400" dirty="0" smtClean="0">
-                <a:latin typeface="Arial" panose="020B0604020202020204" pitchFamily="34" charset="0"/>
-                <a:cs typeface="Arial" panose="020B0604020202020204" pitchFamily="34" charset="0"/>
-              </a:rPr>
-              <a:t>P (vijayalakshmi182008@gmail.com)</a:t>
-            </a:r>
             <a:endParaRPr lang="en-IN" sz="2400" dirty="0">
               <a:latin typeface="Arial" panose="020B0604020202020204" pitchFamily="34" charset="0"/>
               <a:cs typeface="Arial" panose="020B0604020202020204" pitchFamily="34" charset="0"/>
@@ -2314,11 +1990,6 @@
         </p:txBody>
       </p:sp>
     </p:spTree>
-    <p:extLst>
-      <p:ext uri="{BB962C8B-B14F-4D97-AF65-F5344CB8AC3E}">
-        <p14:creationId xmlns="" xmlns:p14="http://schemas.microsoft.com/office/powerpoint/2010/main" val="1052782574"/>
-      </p:ext>
-    </p:extLst>
   </p:cSld>
   <p:clrMapOvr>
     <a:masterClrMapping/>
@@ -2331,13 +2002,7 @@
   <p:cSld>
     <p:spTree>
       <p:nvGrpSpPr>
-        <p:cNvPr id="1" name="">
-          <a:extLst>
-            <a:ext uri="{FF2B5EF4-FFF2-40B4-BE49-F238E27FC236}">
-              <a16:creationId xmlns="" xmlns:a16="http://schemas.microsoft.com/office/drawing/2014/main" id="{E016DA11-5FD7-2565-EB77-06958C244CAE}"/>
-            </a:ext>
-          </a:extLst>
-        </p:cNvPr>
+        <p:cNvPr id="1" name=""/>
         <p:cNvGrpSpPr/>
         <p:nvPr/>
       </p:nvGrpSpPr>
@@ -2351,13 +2016,7 @@
       </p:grpSpPr>
       <p:sp>
         <p:nvSpPr>
-          <p:cNvPr id="3" name="TextBox 2">
-            <a:extLst>
-              <a:ext uri="{FF2B5EF4-FFF2-40B4-BE49-F238E27FC236}">
-                <a16:creationId xmlns="" xmlns:a16="http://schemas.microsoft.com/office/drawing/2014/main" id="{66738D55-BF6B-C938-1AE0-1FB61FCE328F}"/>
-              </a:ext>
-            </a:extLst>
-          </p:cNvPr>
+          <p:cNvPr id="3" name="TextBox 2"/>
           <p:cNvSpPr txBox="1"/>
           <p:nvPr/>
         </p:nvSpPr>
@@ -2393,13 +2052,7 @@
       </p:sp>
       <p:sp>
         <p:nvSpPr>
-          <p:cNvPr id="5" name="TextBox 4">
-            <a:extLst>
-              <a:ext uri="{FF2B5EF4-FFF2-40B4-BE49-F238E27FC236}">
-                <a16:creationId xmlns="" xmlns:a16="http://schemas.microsoft.com/office/drawing/2014/main" id="{9BAF9863-179F-4A34-10C0-A1F57268366C}"/>
-              </a:ext>
-            </a:extLst>
-          </p:cNvPr>
+          <p:cNvPr id="5" name="TextBox 4"/>
           <p:cNvSpPr txBox="1"/>
           <p:nvPr/>
         </p:nvSpPr>
@@ -2432,6 +2085,9 @@
               </a:rPr>
               <a:t>Problem Statement</a:t>
             </a:r>
+            <a:endParaRPr lang="en-IN" dirty="0">
+              <a:latin typeface="TWK Everett" panose="020B0204000000000000" pitchFamily="34" charset="0"/>
+            </a:endParaRPr>
           </a:p>
           <a:p>
             <a:pPr marL="285750" indent="-285750">
@@ -2447,6 +2103,9 @@
               </a:rPr>
               <a:t>Expected Solution</a:t>
             </a:r>
+            <a:endParaRPr lang="en-IN" dirty="0">
+              <a:latin typeface="TWK Everett" panose="020B0204000000000000" pitchFamily="34" charset="0"/>
+            </a:endParaRPr>
           </a:p>
           <a:p>
             <a:pPr marL="285750" indent="-285750">
@@ -2462,6 +2121,9 @@
               </a:rPr>
               <a:t>Technical Architecture</a:t>
             </a:r>
+            <a:endParaRPr lang="en-IN" dirty="0">
+              <a:latin typeface="TWK Everett" panose="020B0204000000000000" pitchFamily="34" charset="0"/>
+            </a:endParaRPr>
           </a:p>
           <a:p>
             <a:pPr marL="285750" indent="-285750">
@@ -2489,6 +2151,9 @@
               </a:rPr>
               <a:t> service to be used)</a:t>
             </a:r>
+            <a:endParaRPr lang="en-IN" dirty="0">
+              <a:latin typeface="TWK Everett" panose="020B0204000000000000" pitchFamily="34" charset="0"/>
+            </a:endParaRPr>
           </a:p>
           <a:p>
             <a:pPr marL="285750" indent="-285750">
@@ -2504,15 +2169,13 @@
               </a:rPr>
               <a:t>Tech Diagram, Stack &amp; GitHub Repo Link</a:t>
             </a:r>
+            <a:endParaRPr lang="en-IN" dirty="0">
+              <a:latin typeface="TWK Everett" panose="020B0204000000000000" pitchFamily="34" charset="0"/>
+            </a:endParaRPr>
           </a:p>
         </p:txBody>
       </p:sp>
     </p:spTree>
-    <p:extLst>
-      <p:ext uri="{BB962C8B-B14F-4D97-AF65-F5344CB8AC3E}">
-        <p14:creationId xmlns="" xmlns:p14="http://schemas.microsoft.com/office/powerpoint/2010/main" val="2491953126"/>
-      </p:ext>
-    </p:extLst>
   </p:cSld>
   <p:clrMapOvr>
     <a:masterClrMapping/>
@@ -2525,13 +2188,7 @@
   <p:cSld>
     <p:spTree>
       <p:nvGrpSpPr>
-        <p:cNvPr id="1" name="">
-          <a:extLst>
-            <a:ext uri="{FF2B5EF4-FFF2-40B4-BE49-F238E27FC236}">
-              <a16:creationId xmlns="" xmlns:a16="http://schemas.microsoft.com/office/drawing/2014/main" id="{4C3F3FF5-EF6A-FC0E-7A22-8E1D507FA043}"/>
-            </a:ext>
-          </a:extLst>
-        </p:cNvPr>
+        <p:cNvPr id="1" name=""/>
         <p:cNvGrpSpPr/>
         <p:nvPr/>
       </p:nvGrpSpPr>
@@ -2545,13 +2202,7 @@
       </p:grpSpPr>
       <p:sp>
         <p:nvSpPr>
-          <p:cNvPr id="3" name="TextBox 2">
-            <a:extLst>
-              <a:ext uri="{FF2B5EF4-FFF2-40B4-BE49-F238E27FC236}">
-                <a16:creationId xmlns="" xmlns:a16="http://schemas.microsoft.com/office/drawing/2014/main" id="{6383454E-55CE-CA8E-4627-FA5816B4B28D}"/>
-              </a:ext>
-            </a:extLst>
-          </p:cNvPr>
+          <p:cNvPr id="3" name="TextBox 2"/>
           <p:cNvSpPr txBox="1"/>
           <p:nvPr/>
         </p:nvSpPr>
@@ -2578,14 +2229,18 @@
               </a:rPr>
               <a:t>Domain: Sustainability and secure digital India</a:t>
             </a:r>
-          </a:p>
-          <a:p>
             <a:endParaRPr lang="en-US" sz="2400" b="1" dirty="0">
               <a:latin typeface="Arial" panose="020B0604020202020204" pitchFamily="34" charset="0"/>
               <a:cs typeface="Arial" panose="020B0604020202020204" pitchFamily="34" charset="0"/>
             </a:endParaRPr>
           </a:p>
           <a:p>
+            <a:endParaRPr lang="en-US" sz="2400" b="1" dirty="0">
+              <a:latin typeface="Arial" panose="020B0604020202020204" pitchFamily="34" charset="0"/>
+              <a:cs typeface="Arial" panose="020B0604020202020204" pitchFamily="34" charset="0"/>
+            </a:endParaRPr>
+          </a:p>
+          <a:p>
             <a:r>
               <a:rPr lang="en-US" b="1" dirty="0">
                 <a:latin typeface="Arial" panose="020B0604020202020204" pitchFamily="34" charset="0"/>
@@ -2593,6 +2248,10 @@
               </a:rPr>
               <a:t>Problem Statement: AI Breath-Print food spoilage detector ( Smell, Pattern, Intelligence system).</a:t>
             </a:r>
+            <a:endParaRPr lang="en-US" b="1" dirty="0">
+              <a:latin typeface="Arial" panose="020B0604020202020204" pitchFamily="34" charset="0"/>
+              <a:cs typeface="Arial" panose="020B0604020202020204" pitchFamily="34" charset="0"/>
+            </a:endParaRPr>
           </a:p>
           <a:p>
             <a:endParaRPr lang="en-US" b="1" dirty="0">
@@ -2615,8 +2274,6 @@
               </a:rPr>
               <a:t>In the food industry, detecting spoilage early is important for food safety, cutting waste, and improving consumer health. Traditional spoilage detection methods mainly depend on visual checks or basic expiration dates. These methods often miss early spoilage, especially when changes aren't obvious to the eye. </a:t>
             </a:r>
-          </a:p>
-          <a:p>
             <a:endParaRPr lang="en-US" b="0" i="0" dirty="0">
               <a:solidFill>
                 <a:srgbClr val="1F243C"/>
@@ -2626,6 +2283,15 @@
             </a:endParaRPr>
           </a:p>
           <a:p>
+            <a:endParaRPr lang="en-US" b="0" i="0" dirty="0">
+              <a:solidFill>
+                <a:srgbClr val="1F243C"/>
+              </a:solidFill>
+              <a:effectLst/>
+              <a:latin typeface="Inter"/>
+            </a:endParaRPr>
+          </a:p>
+          <a:p>
             <a:pPr marL="285750" indent="-285750">
               <a:buFont typeface="Arial" panose="020B0604020202020204" pitchFamily="34" charset="0"/>
               <a:buChar char="•"/>
@@ -2640,8 +2306,6 @@
               </a:rPr>
               <a:t>This project seeks to create an AI-based Breath Food Spoilage Intelligence System. It will use sensor technologies and machine learning to identify food spoilage by examining smell patterns and small changes before they become visible.</a:t>
             </a:r>
-          </a:p>
-          <a:p>
             <a:endParaRPr lang="en-US" b="0" i="0" dirty="0">
               <a:solidFill>
                 <a:srgbClr val="1F243C"/>
@@ -2651,6 +2315,15 @@
             </a:endParaRPr>
           </a:p>
           <a:p>
+            <a:endParaRPr lang="en-US" b="0" i="0" dirty="0">
+              <a:solidFill>
+                <a:srgbClr val="1F243C"/>
+              </a:solidFill>
+              <a:effectLst/>
+              <a:latin typeface="Inter"/>
+            </a:endParaRPr>
+          </a:p>
+          <a:p>
             <a:pPr marL="285750" indent="-285750">
               <a:buFont typeface="Arial" panose="020B0604020202020204" pitchFamily="34" charset="0"/>
               <a:buChar char="•"/>
@@ -2665,8 +2338,6 @@
               </a:rPr>
               <a:t>The system will capture and interpret subtle gas emissions, such as ammonia, CO₂, and VOCs, released during spoilage. It will also use AI models trained to recognize spoilage patterns, allowing for real-time and accurate spoilage detection.</a:t>
             </a:r>
-          </a:p>
-          <a:p>
             <a:endParaRPr lang="en-US" b="0" i="0" dirty="0">
               <a:solidFill>
                 <a:srgbClr val="1F243C"/>
@@ -2676,6 +2347,15 @@
             </a:endParaRPr>
           </a:p>
           <a:p>
+            <a:endParaRPr lang="en-US" b="0" i="0" dirty="0">
+              <a:solidFill>
+                <a:srgbClr val="1F243C"/>
+              </a:solidFill>
+              <a:effectLst/>
+              <a:latin typeface="Inter"/>
+            </a:endParaRPr>
+          </a:p>
+          <a:p>
             <a:pPr marL="285750" indent="-285750">
               <a:buFont typeface="Arial" panose="020B0604020202020204" pitchFamily="34" charset="0"/>
               <a:buChar char="•"/>
@@ -2690,6 +2370,13 @@
               </a:rPr>
               <a:t> The main goal is to build a multi-sensor fusion system. This system will combine gas sensors, environmental sensors like temperature and humidity, and possibly visual sensors. It will continuously monitor food quality and predict spoilage accurately.</a:t>
             </a:r>
+            <a:endParaRPr lang="en-US" b="0" i="0" dirty="0">
+              <a:solidFill>
+                <a:srgbClr val="1F243C"/>
+              </a:solidFill>
+              <a:effectLst/>
+              <a:latin typeface="Inter"/>
+            </a:endParaRPr>
           </a:p>
           <a:p>
             <a:r>
@@ -2702,6 +2389,13 @@
               </a:rPr>
               <a:t> </a:t>
             </a:r>
+            <a:endParaRPr lang="en-US" b="0" i="0" dirty="0">
+              <a:solidFill>
+                <a:srgbClr val="1F243C"/>
+              </a:solidFill>
+              <a:effectLst/>
+              <a:latin typeface="Inter"/>
+            </a:endParaRPr>
           </a:p>
           <a:p>
             <a:pPr marL="285750" indent="-285750">
@@ -2750,11 +2444,6 @@
         </p:txBody>
       </p:sp>
     </p:spTree>
-    <p:extLst>
-      <p:ext uri="{BB962C8B-B14F-4D97-AF65-F5344CB8AC3E}">
-        <p14:creationId xmlns="" xmlns:p14="http://schemas.microsoft.com/office/powerpoint/2010/main" val="3345199169"/>
-      </p:ext>
-    </p:extLst>
   </p:cSld>
   <p:clrMapOvr>
     <a:masterClrMapping/>
@@ -2767,13 +2456,7 @@
   <p:cSld>
     <p:spTree>
       <p:nvGrpSpPr>
-        <p:cNvPr id="1" name="">
-          <a:extLst>
-            <a:ext uri="{FF2B5EF4-FFF2-40B4-BE49-F238E27FC236}">
-              <a16:creationId xmlns="" xmlns:a16="http://schemas.microsoft.com/office/drawing/2014/main" id="{34163A0D-21C2-30D7-3D22-3C835BACCAFE}"/>
-            </a:ext>
-          </a:extLst>
-        </p:cNvPr>
+        <p:cNvPr id="1" name=""/>
         <p:cNvGrpSpPr/>
         <p:nvPr/>
       </p:nvGrpSpPr>
@@ -2787,13 +2470,7 @@
       </p:grpSpPr>
       <p:sp>
         <p:nvSpPr>
-          <p:cNvPr id="3" name="TextBox 2">
-            <a:extLst>
-              <a:ext uri="{FF2B5EF4-FFF2-40B4-BE49-F238E27FC236}">
-                <a16:creationId xmlns="" xmlns:a16="http://schemas.microsoft.com/office/drawing/2014/main" id="{8A619058-5607-DA9E-1F26-C37018687E3D}"/>
-              </a:ext>
-            </a:extLst>
-          </p:cNvPr>
+          <p:cNvPr id="3" name="TextBox 2"/>
           <p:cNvSpPr txBox="1"/>
           <p:nvPr/>
         </p:nvSpPr>
@@ -2820,6 +2497,10 @@
               </a:rPr>
               <a:t>Expected Solution</a:t>
             </a:r>
+            <a:endParaRPr lang="en-US" sz="2400" b="1" dirty="0">
+              <a:latin typeface="Arial" panose="020B0604020202020204" pitchFamily="34" charset="0"/>
+              <a:cs typeface="Arial" panose="020B0604020202020204" pitchFamily="34" charset="0"/>
+            </a:endParaRPr>
           </a:p>
           <a:p>
             <a:endParaRPr lang="en-US" sz="2400" b="1" dirty="0">
@@ -2839,6 +2520,10 @@
               </a:rPr>
               <a:t>The AI-Breath Food Spoilage Intelligence System provides a unique and effective way to detect spoilage early by analyzing smell patterns and environmental conditions with the help of AI.</a:t>
             </a:r>
+            <a:endParaRPr lang="en-US" dirty="0">
+              <a:latin typeface="Arial" panose="020B0604020202020204" pitchFamily="34" charset="0"/>
+              <a:cs typeface="Arial" panose="020B0604020202020204" pitchFamily="34" charset="0"/>
+            </a:endParaRPr>
           </a:p>
           <a:p>
             <a:pPr marL="285750" indent="-285750">
@@ -2852,6 +2537,10 @@
               </a:rPr>
               <a:t> This system goes beyond the usual visual methods of detecting spoilage. It offers real-time assessments that lower food waste, improve food safety, and boost food management practices for both households and businesses.</a:t>
             </a:r>
+            <a:endParaRPr lang="en-US" dirty="0">
+              <a:latin typeface="Arial" panose="020B0604020202020204" pitchFamily="34" charset="0"/>
+              <a:cs typeface="Arial" panose="020B0604020202020204" pitchFamily="34" charset="0"/>
+            </a:endParaRPr>
           </a:p>
           <a:p>
             <a:pPr marL="285750" indent="-285750">
@@ -2872,6 +2561,10 @@
               </a:rPr>
               <a:t>.</a:t>
             </a:r>
+            <a:endParaRPr lang="en-US" b="1" dirty="0">
+              <a:latin typeface="Arial" panose="020B0604020202020204" pitchFamily="34" charset="0"/>
+              <a:cs typeface="Arial" panose="020B0604020202020204" pitchFamily="34" charset="0"/>
+            </a:endParaRPr>
           </a:p>
           <a:p>
             <a:endParaRPr lang="en-US" b="1" dirty="0">
@@ -2891,6 +2584,10 @@
               </a:rPr>
               <a:t>Food Waste Reduction.</a:t>
             </a:r>
+            <a:endParaRPr lang="en-US" b="1" dirty="0">
+              <a:latin typeface="Arial" panose="020B0604020202020204" pitchFamily="34" charset="0"/>
+              <a:cs typeface="Arial" panose="020B0604020202020204" pitchFamily="34" charset="0"/>
+            </a:endParaRPr>
           </a:p>
           <a:p>
             <a:pPr marL="285750" indent="-285750">
@@ -2904,6 +2601,10 @@
               </a:rPr>
               <a:t>Improved Food Safety.</a:t>
             </a:r>
+            <a:endParaRPr lang="en-US" b="1" dirty="0">
+              <a:latin typeface="Arial" panose="020B0604020202020204" pitchFamily="34" charset="0"/>
+              <a:cs typeface="Arial" panose="020B0604020202020204" pitchFamily="34" charset="0"/>
+            </a:endParaRPr>
           </a:p>
           <a:p>
             <a:pPr marL="285750" indent="-285750">
@@ -2917,6 +2618,10 @@
               </a:rPr>
               <a:t>Cost Savings for Businesses.</a:t>
             </a:r>
+            <a:endParaRPr lang="en-US" b="1" dirty="0">
+              <a:latin typeface="Arial" panose="020B0604020202020204" pitchFamily="34" charset="0"/>
+              <a:cs typeface="Arial" panose="020B0604020202020204" pitchFamily="34" charset="0"/>
+            </a:endParaRPr>
           </a:p>
           <a:p>
             <a:pPr marL="285750" indent="-285750">
@@ -2930,6 +2635,10 @@
               </a:rPr>
               <a:t>Better Inventory and Resource Management.</a:t>
             </a:r>
+            <a:endParaRPr lang="en-US" b="1" dirty="0">
+              <a:latin typeface="Arial" panose="020B0604020202020204" pitchFamily="34" charset="0"/>
+              <a:cs typeface="Arial" panose="020B0604020202020204" pitchFamily="34" charset="0"/>
+            </a:endParaRPr>
           </a:p>
           <a:p>
             <a:r>
@@ -2939,6 +2648,10 @@
               </a:rPr>
               <a:t>                                   </a:t>
             </a:r>
+            <a:endParaRPr lang="en-US" b="1" dirty="0">
+              <a:latin typeface="Arial" panose="020B0604020202020204" pitchFamily="34" charset="0"/>
+              <a:cs typeface="Arial" panose="020B0604020202020204" pitchFamily="34" charset="0"/>
+            </a:endParaRPr>
           </a:p>
           <a:p>
             <a:endParaRPr lang="en-IN" b="1" dirty="0">
@@ -2949,11 +2662,6 @@
         </p:txBody>
       </p:sp>
     </p:spTree>
-    <p:extLst>
-      <p:ext uri="{BB962C8B-B14F-4D97-AF65-F5344CB8AC3E}">
-        <p14:creationId xmlns="" xmlns:p14="http://schemas.microsoft.com/office/powerpoint/2010/main" val="3171667576"/>
-      </p:ext>
-    </p:extLst>
   </p:cSld>
   <p:clrMapOvr>
     <a:masterClrMapping/>
@@ -2966,13 +2674,7 @@
   <p:cSld>
     <p:spTree>
       <p:nvGrpSpPr>
-        <p:cNvPr id="1" name="">
-          <a:extLst>
-            <a:ext uri="{FF2B5EF4-FFF2-40B4-BE49-F238E27FC236}">
-              <a16:creationId xmlns="" xmlns:a16="http://schemas.microsoft.com/office/drawing/2014/main" id="{084900F5-BDFC-CBD0-03D3-22294219D4CA}"/>
-            </a:ext>
-          </a:extLst>
-        </p:cNvPr>
+        <p:cNvPr id="1" name=""/>
         <p:cNvGrpSpPr/>
         <p:nvPr/>
       </p:nvGrpSpPr>
@@ -2986,13 +2688,7 @@
       </p:grpSpPr>
       <p:sp>
         <p:nvSpPr>
-          <p:cNvPr id="3" name="TextBox 2">
-            <a:extLst>
-              <a:ext uri="{FF2B5EF4-FFF2-40B4-BE49-F238E27FC236}">
-                <a16:creationId xmlns="" xmlns:a16="http://schemas.microsoft.com/office/drawing/2014/main" id="{9C3ECA58-4E9A-3B73-ED7A-E46EE9224EC6}"/>
-              </a:ext>
-            </a:extLst>
-          </p:cNvPr>
+          <p:cNvPr id="3" name="TextBox 2"/>
           <p:cNvSpPr txBox="1"/>
           <p:nvPr/>
         </p:nvSpPr>
@@ -3026,6 +2722,10 @@
               </a:rPr>
               <a:t>Architecture</a:t>
             </a:r>
+            <a:endParaRPr lang="en-US" sz="2400" b="1" dirty="0" smtClean="0">
+              <a:latin typeface="Arial" panose="020B0604020202020204" pitchFamily="34" charset="0"/>
+              <a:cs typeface="Arial" panose="020B0604020202020204" pitchFamily="34" charset="0"/>
+            </a:endParaRPr>
           </a:p>
           <a:p>
             <a:endParaRPr lang="en-US" sz="2400" b="1" dirty="0" smtClean="0">
@@ -3041,6 +2741,7 @@
               <a:rPr lang="en-US" dirty="0" smtClean="0"/>
               <a:t>Sensing Layer Gas sensors detect smell (VOCs) released from food. </a:t>
             </a:r>
+            <a:endParaRPr lang="en-US" dirty="0" smtClean="0"/>
           </a:p>
           <a:p>
             <a:pPr marL="342900" indent="-342900"/>
@@ -3048,6 +2749,7 @@
               <a:rPr lang="en-US" dirty="0" smtClean="0"/>
               <a:t>     Components: MQ-135 Gas Sensor Module, </a:t>
             </a:r>
+            <a:endParaRPr lang="en-US" dirty="0" smtClean="0"/>
           </a:p>
           <a:p>
             <a:pPr marL="342900" indent="-342900"/>
@@ -3055,6 +2757,7 @@
               <a:rPr lang="en-US" dirty="0" smtClean="0"/>
               <a:t>                           MQ-3 Gas Sensor Module,</a:t>
             </a:r>
+            <a:endParaRPr lang="en-US" dirty="0" smtClean="0"/>
           </a:p>
           <a:p>
             <a:pPr marL="342900" indent="-342900"/>
@@ -3062,6 +2765,7 @@
               <a:rPr lang="en-US" dirty="0" smtClean="0"/>
               <a:t>                           DHT11 Temperature and Humidity Sensor connected to ESP32. </a:t>
             </a:r>
+            <a:endParaRPr lang="en-US" dirty="0" smtClean="0"/>
           </a:p>
           <a:p>
             <a:pPr marL="342900" indent="-342900"/>
@@ -3081,6 +2785,7 @@
               <a:rPr lang="en-US" dirty="0" smtClean="0"/>
               <a:t>.</a:t>
             </a:r>
+            <a:endParaRPr lang="en-US" dirty="0" smtClean="0"/>
           </a:p>
           <a:p>
             <a:pPr marL="342900" indent="-342900"/>
@@ -3092,6 +2797,7 @@
               <a:rPr lang="en-US" dirty="0" smtClean="0"/>
               <a:t> 3.  AI Detection Layer Machine learning models such as Random Forest Algorithm or Support Vector Machine analyze smell patterns to classify food as Fresh, Spoiling, or Spoiled.</a:t>
             </a:r>
+            <a:endParaRPr lang="en-US" dirty="0" smtClean="0"/>
           </a:p>
           <a:p>
             <a:pPr marL="342900" indent="-342900"/>
@@ -3103,6 +2809,7 @@
               <a:rPr lang="en-US" dirty="0" smtClean="0"/>
               <a:t> 4.  Edge Computing Layer The trained model runs on Raspberry Pi 4 for real-time detection.</a:t>
             </a:r>
+            <a:endParaRPr lang="en-US" dirty="0" smtClean="0"/>
           </a:p>
           <a:p>
             <a:pPr marL="342900" indent="-342900"/>
@@ -3110,6 +2817,7 @@
               <a:rPr lang="en-US" dirty="0" smtClean="0"/>
               <a:t> </a:t>
             </a:r>
+            <a:endParaRPr lang="en-US" dirty="0" smtClean="0"/>
           </a:p>
           <a:p>
             <a:pPr marL="342900" indent="-342900"/>
@@ -3117,6 +2825,7 @@
               <a:rPr lang="en-US" dirty="0" smtClean="0"/>
               <a:t>5.  User Interface Layer Results are displayed in a mobile/web dashboard using tools like Flutter.</a:t>
             </a:r>
+            <a:endParaRPr lang="en-US" dirty="0" smtClean="0"/>
           </a:p>
           <a:p>
             <a:pPr marL="342900" indent="-342900"/>
@@ -3136,11 +2845,6 @@
         </p:txBody>
       </p:sp>
     </p:spTree>
-    <p:extLst>
-      <p:ext uri="{BB962C8B-B14F-4D97-AF65-F5344CB8AC3E}">
-        <p14:creationId xmlns="" xmlns:p14="http://schemas.microsoft.com/office/powerpoint/2010/main" val="3772352513"/>
-      </p:ext>
-    </p:extLst>
   </p:cSld>
   <p:clrMapOvr>
     <a:masterClrMapping/>
@@ -3153,13 +2857,7 @@
   <p:cSld>
     <p:spTree>
       <p:nvGrpSpPr>
-        <p:cNvPr id="1" name="">
-          <a:extLst>
-            <a:ext uri="{FF2B5EF4-FFF2-40B4-BE49-F238E27FC236}">
-              <a16:creationId xmlns="" xmlns:a16="http://schemas.microsoft.com/office/drawing/2014/main" id="{2CD7B49D-9842-6365-9622-2894A2D85820}"/>
-            </a:ext>
-          </a:extLst>
-        </p:cNvPr>
+        <p:cNvPr id="1" name=""/>
         <p:cNvGrpSpPr/>
         <p:nvPr/>
       </p:nvGrpSpPr>
@@ -3173,13 +2871,7 @@
       </p:grpSpPr>
       <p:sp>
         <p:nvSpPr>
-          <p:cNvPr id="3" name="TextBox 2">
-            <a:extLst>
-              <a:ext uri="{FF2B5EF4-FFF2-40B4-BE49-F238E27FC236}">
-                <a16:creationId xmlns="" xmlns:a16="http://schemas.microsoft.com/office/drawing/2014/main" id="{2EF64FFD-ACC8-2ABB-9248-D53CD17C355A}"/>
-              </a:ext>
-            </a:extLst>
-          </p:cNvPr>
+          <p:cNvPr id="3" name="TextBox 2"/>
           <p:cNvSpPr txBox="1"/>
           <p:nvPr/>
         </p:nvSpPr>
@@ -3227,16 +2919,20 @@
               </a:rPr>
               <a:t>)</a:t>
             </a:r>
-          </a:p>
-          <a:p>
             <a:endParaRPr lang="en-US" sz="2400" b="1" dirty="0" smtClean="0">
               <a:latin typeface="Arial" panose="020B0604020202020204" pitchFamily="34" charset="0"/>
               <a:cs typeface="Arial" panose="020B0604020202020204" pitchFamily="34" charset="0"/>
             </a:endParaRPr>
           </a:p>
           <a:p>
+            <a:endParaRPr lang="en-US" sz="2400" b="1" dirty="0" smtClean="0">
+              <a:latin typeface="Arial" panose="020B0604020202020204" pitchFamily="34" charset="0"/>
+              <a:cs typeface="Arial" panose="020B0604020202020204" pitchFamily="34" charset="0"/>
+            </a:endParaRPr>
+          </a:p>
+          <a:p>
             <a:pPr>
-              <a:buFont typeface="Arial" pitchFamily="34" charset="0"/>
+              <a:buFont typeface="Arial" panose="020B0604020202020204" pitchFamily="34" charset="0"/>
               <a:buChar char="•"/>
             </a:pPr>
             <a:r>
@@ -3260,6 +2956,10 @@
               </a:rPr>
               <a:t>) </a:t>
             </a:r>
+            <a:endParaRPr lang="en-GB" dirty="0" smtClean="0">
+              <a:latin typeface="Arial" panose="020B0604020202020204" pitchFamily="34" charset="0"/>
+              <a:cs typeface="Arial" panose="020B0604020202020204" pitchFamily="34" charset="0"/>
+            </a:endParaRPr>
           </a:p>
           <a:p>
             <a:r>
@@ -3297,16 +2997,20 @@
               </a:rPr>
               <a:t> Core. This enables real-time monitoring of food freshness.  </a:t>
             </a:r>
-          </a:p>
-          <a:p>
             <a:endParaRPr lang="en-GB" dirty="0" smtClean="0">
               <a:latin typeface="Arial" panose="020B0604020202020204" pitchFamily="34" charset="0"/>
               <a:cs typeface="Arial" panose="020B0604020202020204" pitchFamily="34" charset="0"/>
             </a:endParaRPr>
           </a:p>
           <a:p>
+            <a:endParaRPr lang="en-GB" dirty="0" smtClean="0">
+              <a:latin typeface="Arial" panose="020B0604020202020204" pitchFamily="34" charset="0"/>
+              <a:cs typeface="Arial" panose="020B0604020202020204" pitchFamily="34" charset="0"/>
+            </a:endParaRPr>
+          </a:p>
+          <a:p>
             <a:pPr>
-              <a:buFont typeface="Arial" pitchFamily="34" charset="0"/>
+              <a:buFont typeface="Arial" panose="020B0604020202020204" pitchFamily="34" charset="0"/>
               <a:buChar char="•"/>
             </a:pPr>
             <a:r>
@@ -3316,6 +3020,10 @@
               </a:rPr>
               <a:t> Artificial Intelligence / Machine Learning  </a:t>
             </a:r>
+            <a:endParaRPr lang="en-GB" dirty="0" smtClean="0">
+              <a:latin typeface="Arial" panose="020B0604020202020204" pitchFamily="34" charset="0"/>
+              <a:cs typeface="Arial" panose="020B0604020202020204" pitchFamily="34" charset="0"/>
+            </a:endParaRPr>
           </a:p>
           <a:p>
             <a:r>
@@ -3339,16 +3047,20 @@
               </a:rPr>
               <a:t>.  </a:t>
             </a:r>
-          </a:p>
-          <a:p>
             <a:endParaRPr lang="en-GB" dirty="0" smtClean="0">
               <a:latin typeface="Arial" panose="020B0604020202020204" pitchFamily="34" charset="0"/>
               <a:cs typeface="Arial" panose="020B0604020202020204" pitchFamily="34" charset="0"/>
             </a:endParaRPr>
           </a:p>
           <a:p>
+            <a:endParaRPr lang="en-GB" dirty="0" smtClean="0">
+              <a:latin typeface="Arial" panose="020B0604020202020204" pitchFamily="34" charset="0"/>
+              <a:cs typeface="Arial" panose="020B0604020202020204" pitchFamily="34" charset="0"/>
+            </a:endParaRPr>
+          </a:p>
+          <a:p>
             <a:pPr>
-              <a:buFont typeface="Arial" pitchFamily="34" charset="0"/>
+              <a:buFont typeface="Arial" panose="020B0604020202020204" pitchFamily="34" charset="0"/>
               <a:buChar char="•"/>
             </a:pPr>
             <a:r>
@@ -3358,6 +3070,10 @@
               </a:rPr>
               <a:t> Cloud Computing  </a:t>
             </a:r>
+            <a:endParaRPr lang="en-GB" dirty="0" smtClean="0">
+              <a:latin typeface="Arial" panose="020B0604020202020204" pitchFamily="34" charset="0"/>
+              <a:cs typeface="Arial" panose="020B0604020202020204" pitchFamily="34" charset="0"/>
+            </a:endParaRPr>
           </a:p>
           <a:p>
             <a:r>
@@ -3367,16 +3083,20 @@
               </a:rPr>
               <a:t>Cloud computing offers storage and processing power for the project. Sensor data is stored and managed in AWS cloud services, such as Amazon S3, and processed with AWS Lambda.  </a:t>
             </a:r>
-          </a:p>
-          <a:p>
             <a:endParaRPr lang="en-GB" dirty="0" smtClean="0">
               <a:latin typeface="Arial" panose="020B0604020202020204" pitchFamily="34" charset="0"/>
               <a:cs typeface="Arial" panose="020B0604020202020204" pitchFamily="34" charset="0"/>
             </a:endParaRPr>
           </a:p>
           <a:p>
+            <a:endParaRPr lang="en-GB" dirty="0" smtClean="0">
+              <a:latin typeface="Arial" panose="020B0604020202020204" pitchFamily="34" charset="0"/>
+              <a:cs typeface="Arial" panose="020B0604020202020204" pitchFamily="34" charset="0"/>
+            </a:endParaRPr>
+          </a:p>
+          <a:p>
             <a:pPr>
-              <a:buFont typeface="Arial" pitchFamily="34" charset="0"/>
+              <a:buFont typeface="Arial" panose="020B0604020202020204" pitchFamily="34" charset="0"/>
               <a:buChar char="•"/>
             </a:pPr>
             <a:r>
@@ -3386,6 +3106,10 @@
               </a:rPr>
               <a:t> Data Analytics  </a:t>
             </a:r>
+            <a:endParaRPr lang="en-GB" dirty="0" smtClean="0">
+              <a:latin typeface="Arial" panose="020B0604020202020204" pitchFamily="34" charset="0"/>
+              <a:cs typeface="Arial" panose="020B0604020202020204" pitchFamily="34" charset="0"/>
+            </a:endParaRPr>
           </a:p>
           <a:p>
             <a:r>
@@ -3409,16 +3133,20 @@
               </a:rPr>
               <a:t> Analytics, assist in understanding the data trends.  </a:t>
             </a:r>
-          </a:p>
-          <a:p>
             <a:endParaRPr lang="en-GB" dirty="0" smtClean="0">
               <a:latin typeface="Arial" panose="020B0604020202020204" pitchFamily="34" charset="0"/>
               <a:cs typeface="Arial" panose="020B0604020202020204" pitchFamily="34" charset="0"/>
             </a:endParaRPr>
           </a:p>
           <a:p>
+            <a:endParaRPr lang="en-GB" dirty="0" smtClean="0">
+              <a:latin typeface="Arial" panose="020B0604020202020204" pitchFamily="34" charset="0"/>
+              <a:cs typeface="Arial" panose="020B0604020202020204" pitchFamily="34" charset="0"/>
+            </a:endParaRPr>
+          </a:p>
+          <a:p>
             <a:pPr>
-              <a:buFont typeface="Arial" pitchFamily="34" charset="0"/>
+              <a:buFont typeface="Arial" panose="020B0604020202020204" pitchFamily="34" charset="0"/>
               <a:buChar char="•"/>
             </a:pPr>
             <a:r>
@@ -3428,6 +3156,10 @@
               </a:rPr>
               <a:t> Embedded Systems  </a:t>
             </a:r>
+            <a:endParaRPr lang="en-GB" dirty="0" smtClean="0">
+              <a:latin typeface="Arial" panose="020B0604020202020204" pitchFamily="34" charset="0"/>
+              <a:cs typeface="Arial" panose="020B0604020202020204" pitchFamily="34" charset="0"/>
+            </a:endParaRPr>
           </a:p>
           <a:p>
             <a:r>
@@ -3469,11 +3201,6 @@
         </p:txBody>
       </p:sp>
     </p:spTree>
-    <p:extLst>
-      <p:ext uri="{BB962C8B-B14F-4D97-AF65-F5344CB8AC3E}">
-        <p14:creationId xmlns="" xmlns:p14="http://schemas.microsoft.com/office/powerpoint/2010/main" val="685351779"/>
-      </p:ext>
-    </p:extLst>
   </p:cSld>
   <p:clrMapOvr>
     <a:masterClrMapping/>
@@ -3486,13 +3213,7 @@
   <p:cSld>
     <p:spTree>
       <p:nvGrpSpPr>
-        <p:cNvPr id="1" name="">
-          <a:extLst>
-            <a:ext uri="{FF2B5EF4-FFF2-40B4-BE49-F238E27FC236}">
-              <a16:creationId xmlns="" xmlns:a16="http://schemas.microsoft.com/office/drawing/2014/main" id="{BF21016D-FEDD-972A-5B3C-0319A512DC49}"/>
-            </a:ext>
-          </a:extLst>
-        </p:cNvPr>
+        <p:cNvPr id="1" name=""/>
         <p:cNvGrpSpPr/>
         <p:nvPr/>
       </p:nvGrpSpPr>
@@ -3506,13 +3227,7 @@
       </p:grpSpPr>
       <p:sp>
         <p:nvSpPr>
-          <p:cNvPr id="3" name="TextBox 2">
-            <a:extLst>
-              <a:ext uri="{FF2B5EF4-FFF2-40B4-BE49-F238E27FC236}">
-                <a16:creationId xmlns="" xmlns:a16="http://schemas.microsoft.com/office/drawing/2014/main" id="{EFEE72B9-7DF1-BCEB-94BD-3BCE6FEC5335}"/>
-              </a:ext>
-            </a:extLst>
-          </p:cNvPr>
+          <p:cNvPr id="3" name="TextBox 2"/>
           <p:cNvSpPr txBox="1"/>
           <p:nvPr/>
         </p:nvSpPr>
@@ -3546,6 +3261,10 @@
               </a:rPr>
               <a:t>Link:</a:t>
             </a:r>
+            <a:endParaRPr lang="en-US" sz="2400" b="1" dirty="0" smtClean="0">
+              <a:latin typeface="Arial" panose="020B0604020202020204" pitchFamily="34" charset="0"/>
+              <a:cs typeface="Arial" panose="020B0604020202020204" pitchFamily="34" charset="0"/>
+            </a:endParaRPr>
           </a:p>
           <a:p>
             <a:endParaRPr lang="en-US" sz="2400" b="1" dirty="0" smtClean="0">
@@ -3570,7 +3289,7 @@
           <p:nvPr/>
         </p:nvPicPr>
         <p:blipFill>
-          <a:blip r:embed="rId2"/>
+          <a:blip r:embed="rId1"/>
           <a:stretch>
             <a:fillRect/>
           </a:stretch>
@@ -3586,11 +3305,6 @@
         </p:spPr>
       </p:pic>
     </p:spTree>
-    <p:extLst>
-      <p:ext uri="{BB962C8B-B14F-4D97-AF65-F5344CB8AC3E}">
-        <p14:creationId xmlns="" xmlns:p14="http://schemas.microsoft.com/office/powerpoint/2010/main" val="319627171"/>
-      </p:ext>
-    </p:extLst>
   </p:cSld>
   <p:clrMapOvr>
     <a:masterClrMapping/>
@@ -3674,23 +3388,6 @@
         <a:font script="Viet" typeface="Times New Roman"/>
         <a:font script="Uigh" typeface="Microsoft Uighur"/>
         <a:font script="Geor" typeface="Sylfaen"/>
-        <a:font script="Armn" typeface="Arial"/>
-        <a:font script="Bugi" typeface="Leelawadee UI"/>
-        <a:font script="Bopo" typeface="Microsoft JhengHei"/>
-        <a:font script="Java" typeface="Javanese Text"/>
-        <a:font script="Lisu" typeface="Segoe UI"/>
-        <a:font script="Mymr" typeface="Myanmar Text"/>
-        <a:font script="Nkoo" typeface="Ebrima"/>
-        <a:font script="Olck" typeface="Nirmala UI"/>
-        <a:font script="Osma" typeface="Ebrima"/>
-        <a:font script="Phag" typeface="Phagspa"/>
-        <a:font script="Syrn" typeface="Estrangelo Edessa"/>
-        <a:font script="Syrj" typeface="Estrangelo Edessa"/>
-        <a:font script="Syre" typeface="Estrangelo Edessa"/>
-        <a:font script="Sora" typeface="Nirmala UI"/>
-        <a:font script="Tale" typeface="Microsoft Tai Le"/>
-        <a:font script="Talu" typeface="Microsoft New Tai Lue"/>
-        <a:font script="Tfng" typeface="Ebrima"/>
       </a:majorFont>
       <a:minorFont>
         <a:latin typeface="Aptos"/>
@@ -3726,23 +3423,6 @@
         <a:font script="Viet" typeface="Arial"/>
         <a:font script="Uigh" typeface="Microsoft Uighur"/>
         <a:font script="Geor" typeface="Sylfaen"/>
-        <a:font script="Armn" typeface="Arial"/>
-        <a:font script="Bugi" typeface="Leelawadee UI"/>
-        <a:font script="Bopo" typeface="Microsoft JhengHei"/>
-        <a:font script="Java" typeface="Javanese Text"/>
-        <a:font script="Lisu" typeface="Segoe UI"/>
-        <a:font script="Mymr" typeface="Myanmar Text"/>
-        <a:font script="Nkoo" typeface="Ebrima"/>
-        <a:font script="Olck" typeface="Nirmala UI"/>
-        <a:font script="Osma" typeface="Ebrima"/>
-        <a:font script="Phag" typeface="Phagspa"/>
-        <a:font script="Syrn" typeface="Estrangelo Edessa"/>
-        <a:font script="Syrj" typeface="Estrangelo Edessa"/>
-        <a:font script="Syre" typeface="Estrangelo Edessa"/>
-        <a:font script="Sora" typeface="Nirmala UI"/>
-        <a:font script="Tale" typeface="Microsoft Tai Le"/>
-        <a:font script="Talu" typeface="Microsoft New Tai Lue"/>
-        <a:font script="Tfng" typeface="Ebrima"/>
       </a:minorFont>
     </a:fontScheme>
     <a:fmtScheme name="Office">
@@ -3904,10 +3584,9 @@
       </a:style>
     </a:lnDef>
   </a:objectDefaults>
-  <a:extraClrSchemeLst/>
   <a:extLst>
     <a:ext uri="{05A4C25C-085E-4340-85A3-A5531E510DB2}">
-      <thm15:themeFamily xmlns="" xmlns:thm15="http://schemas.microsoft.com/office/thememl/2012/main" name="Office Theme" id="{2E142A2C-CD16-42D6-873A-C26D2A0506FA}" vid="{1BDDFF52-6CD6-40A5-AB3C-68EB2F1E4D0A}"/>
+      <thm15:themeFamily xmlns:thm15="http://schemas.microsoft.com/office/thememl/2012/main" name="Office Theme" id="{62F939B6-93AF-4DB8-9C6B-D6C7DFDC589F}" vid="{4A3C46E8-61CC-4603-A589-7422A47A8E4A}"/>
     </a:ext>
   </a:extLst>
 </a:theme>
@@ -3989,23 +3668,6 @@
         <a:font script="Viet" typeface="Times New Roman"/>
         <a:font script="Uigh" typeface="Microsoft Uighur"/>
         <a:font script="Geor" typeface="Sylfaen"/>
-        <a:font script="Armn" typeface="Arial"/>
-        <a:font script="Bugi" typeface="Leelawadee UI"/>
-        <a:font script="Bopo" typeface="Microsoft JhengHei"/>
-        <a:font script="Java" typeface="Javanese Text"/>
-        <a:font script="Lisu" typeface="Segoe UI"/>
-        <a:font script="Mymr" typeface="Myanmar Text"/>
-        <a:font script="Nkoo" typeface="Ebrima"/>
-        <a:font script="Olck" typeface="Nirmala UI"/>
-        <a:font script="Osma" typeface="Ebrima"/>
-        <a:font script="Phag" typeface="Phagspa"/>
-        <a:font script="Syrn" typeface="Estrangelo Edessa"/>
-        <a:font script="Syrj" typeface="Estrangelo Edessa"/>
-        <a:font script="Syre" typeface="Estrangelo Edessa"/>
-        <a:font script="Sora" typeface="Nirmala UI"/>
-        <a:font script="Tale" typeface="Microsoft Tai Le"/>
-        <a:font script="Talu" typeface="Microsoft New Tai Lue"/>
-        <a:font script="Tfng" typeface="Ebrima"/>
       </a:majorFont>
       <a:minorFont>
         <a:latin typeface="Aptos"/>
@@ -4041,23 +3703,6 @@
         <a:font script="Viet" typeface="Arial"/>
         <a:font script="Uigh" typeface="Microsoft Uighur"/>
         <a:font script="Geor" typeface="Sylfaen"/>
-        <a:font script="Armn" typeface="Arial"/>
-        <a:font script="Bugi" typeface="Leelawadee UI"/>
-        <a:font script="Bopo" typeface="Microsoft JhengHei"/>
-        <a:font script="Java" typeface="Javanese Text"/>
-        <a:font script="Lisu" typeface="Segoe UI"/>
-        <a:font script="Mymr" typeface="Myanmar Text"/>
-        <a:font script="Nkoo" typeface="Ebrima"/>
-        <a:font script="Olck" typeface="Nirmala UI"/>
-        <a:font script="Osma" typeface="Ebrima"/>
-        <a:font script="Phag" typeface="Phagspa"/>
-        <a:font script="Syrn" typeface="Estrangelo Edessa"/>
-        <a:font script="Syrj" typeface="Estrangelo Edessa"/>
-        <a:font script="Syre" typeface="Estrangelo Edessa"/>
-        <a:font script="Sora" typeface="Nirmala UI"/>
-        <a:font script="Tale" typeface="Microsoft Tai Le"/>
-        <a:font script="Talu" typeface="Microsoft New Tai Lue"/>
-        <a:font script="Tfng" typeface="Ebrima"/>
       </a:minorFont>
     </a:fontScheme>
     <a:fmtScheme name="Office">
@@ -4219,18 +3864,10 @@
       </a:style>
     </a:lnDef>
   </a:objectDefaults>
-  <a:extraClrSchemeLst/>
   <a:extLst>
     <a:ext uri="{05A4C25C-085E-4340-85A3-A5531E510DB2}">
-      <thm15:themeFamily xmlns="" xmlns:thm15="http://schemas.microsoft.com/office/thememl/2012/main" name="Office Theme" id="{2E142A2C-CD16-42D6-873A-C26D2A0506FA}" vid="{1BDDFF52-6CD6-40A5-AB3C-68EB2F1E4D0A}"/>
+      <thm15:themeFamily xmlns:thm15="http://schemas.microsoft.com/office/thememl/2012/main" name="Office Theme" id="{62F939B6-93AF-4DB8-9C6B-D6C7DFDC589F}" vid="{4A3C46E8-61CC-4603-A589-7422A47A8E4A}"/>
     </a:ext>
   </a:extLst>
 </a:theme>
-</file>
-
-<file path=docMetadata/LabelInfo.xml><?xml version="1.0" encoding="utf-8"?>
-<clbl:labelList xmlns:clbl="http://schemas.microsoft.com/office/2020/mipLabelMetadata">
-  <clbl:label id="{f260df36-bc43-424c-8f44-c85226657b01}" enabled="0" method="" siteId="{f260df36-bc43-424c-8f44-c85226657b01}" removed="1"/>
-  <clbl:label id="{f42aa342-8706-4288-bd11-ebb85995028c}" enabled="1" method="Privileged" siteId="{72f988bf-86f1-41af-91ab-2d7cd011db47}" removed="0"/>
-</clbl:labelList>
 </file>